--- a/artifacts/report/FOREIGN-report.pptx
+++ b/artifacts/report/FOREIGN-report.pptx
@@ -3590,7 +3590,7 @@
         <p:spPr>
           <a:xfrm>
             <a:off x="658368" y="1792224"/>
-            <a:ext cx="10874959" cy="713232"/>
+            <a:ext cx="10874959" cy="621792"/>
           </a:xfrm>
           <a:prstGeom prst="roundRect">
             <a:avLst/>
@@ -3635,8 +3635,8 @@
         </p:nvSpPr>
         <p:spPr>
           <a:xfrm>
-            <a:off x="877824" y="1975104"/>
-            <a:ext cx="4023360" cy="365760"/>
+            <a:off x="877824" y="1947672"/>
+            <a:ext cx="4023360" cy="329184"/>
           </a:xfrm>
           <a:prstGeom prst="rect">
             <a:avLst/>
@@ -3655,7 +3655,7 @@
               </a:spcAft>
             </a:pPr>
             <a:r>
-              <a:rPr sz="1400" b="1">
+              <a:rPr sz="1300" b="1">
                 <a:solidFill>
                   <a:srgbClr val="E8E4DC"/>
                 </a:solidFill>
@@ -3674,8 +3674,8 @@
         </p:nvSpPr>
         <p:spPr>
           <a:xfrm>
-            <a:off x="4956048" y="1993392"/>
-            <a:ext cx="1097280" cy="329184"/>
+            <a:off x="4956048" y="1965960"/>
+            <a:ext cx="1097280" cy="292608"/>
           </a:xfrm>
           <a:prstGeom prst="rect">
             <a:avLst/>
@@ -3713,8 +3713,8 @@
         </p:nvSpPr>
         <p:spPr>
           <a:xfrm>
-            <a:off x="6144768" y="1993392"/>
-            <a:ext cx="5114239" cy="365760"/>
+            <a:off x="6144768" y="1965960"/>
+            <a:ext cx="5114239" cy="329184"/>
           </a:xfrm>
           <a:prstGeom prst="rect">
             <a:avLst/>
@@ -3752,8 +3752,8 @@
         </p:nvSpPr>
         <p:spPr>
           <a:xfrm>
-            <a:off x="658368" y="2633472"/>
-            <a:ext cx="10874959" cy="713232"/>
+            <a:off x="658368" y="2505456"/>
+            <a:ext cx="10874959" cy="621792"/>
           </a:xfrm>
           <a:prstGeom prst="roundRect">
             <a:avLst/>
@@ -3798,8 +3798,8 @@
         </p:nvSpPr>
         <p:spPr>
           <a:xfrm>
-            <a:off x="877824" y="2816352"/>
-            <a:ext cx="4023360" cy="365760"/>
+            <a:off x="877824" y="2660904"/>
+            <a:ext cx="4023360" cy="329184"/>
           </a:xfrm>
           <a:prstGeom prst="rect">
             <a:avLst/>
@@ -3818,7 +3818,7 @@
               </a:spcAft>
             </a:pPr>
             <a:r>
-              <a:rPr sz="1400" b="1">
+              <a:rPr sz="1300" b="1">
                 <a:solidFill>
                   <a:srgbClr val="E8E4DC"/>
                 </a:solidFill>
@@ -3837,8 +3837,8 @@
         </p:nvSpPr>
         <p:spPr>
           <a:xfrm>
-            <a:off x="4956048" y="2834640"/>
-            <a:ext cx="1097280" cy="329184"/>
+            <a:off x="4956048" y="2679192"/>
+            <a:ext cx="1097280" cy="292608"/>
           </a:xfrm>
           <a:prstGeom prst="rect">
             <a:avLst/>
@@ -3876,8 +3876,8 @@
         </p:nvSpPr>
         <p:spPr>
           <a:xfrm>
-            <a:off x="6144768" y="2834640"/>
-            <a:ext cx="5114239" cy="365760"/>
+            <a:off x="6144768" y="2679192"/>
+            <a:ext cx="5114239" cy="329184"/>
           </a:xfrm>
           <a:prstGeom prst="rect">
             <a:avLst/>
@@ -3915,8 +3915,8 @@
         </p:nvSpPr>
         <p:spPr>
           <a:xfrm>
-            <a:off x="658368" y="3474720"/>
-            <a:ext cx="10874959" cy="713232"/>
+            <a:off x="658368" y="3218688"/>
+            <a:ext cx="10874959" cy="621792"/>
           </a:xfrm>
           <a:prstGeom prst="roundRect">
             <a:avLst/>
@@ -3961,8 +3961,8 @@
         </p:nvSpPr>
         <p:spPr>
           <a:xfrm>
-            <a:off x="877824" y="3657600"/>
-            <a:ext cx="4023360" cy="365760"/>
+            <a:off x="877824" y="3374136"/>
+            <a:ext cx="4023360" cy="329184"/>
           </a:xfrm>
           <a:prstGeom prst="rect">
             <a:avLst/>
@@ -3981,13 +3981,13 @@
               </a:spcAft>
             </a:pPr>
             <a:r>
-              <a:rPr sz="1400" b="1">
+              <a:rPr sz="1300" b="1">
                 <a:solidFill>
                   <a:srgbClr val="E8E4DC"/>
                 </a:solidFill>
                 <a:latin typeface="Segoe UI"/>
               </a:rPr>
-              <a:t>demo 视频</a:t>
+              <a:t>D · 部署 / 报告</a:t>
             </a:r>
           </a:p>
         </p:txBody>
@@ -4000,8 +4000,8 @@
         </p:nvSpPr>
         <p:spPr>
           <a:xfrm>
-            <a:off x="4956048" y="3675888"/>
-            <a:ext cx="1097280" cy="329184"/>
+            <a:off x="4956048" y="3392424"/>
+            <a:ext cx="1097280" cy="292608"/>
           </a:xfrm>
           <a:prstGeom prst="rect">
             <a:avLst/>
@@ -4039,8 +4039,8 @@
         </p:nvSpPr>
         <p:spPr>
           <a:xfrm>
-            <a:off x="6144768" y="3675888"/>
-            <a:ext cx="5114239" cy="365760"/>
+            <a:off x="6144768" y="3392424"/>
+            <a:ext cx="5114239" cy="329184"/>
           </a:xfrm>
           <a:prstGeom prst="rect">
             <a:avLst/>
@@ -4065,7 +4065,7 @@
                 </a:solidFill>
                 <a:latin typeface="Segoe UI"/>
               </a:rPr>
-              <a:t>78 秒真实游玩，清过第 1 层。机器无 GPU，帧率受限。</a:t>
+              <a:t>cyn-nya.github.io/foreign/ —— 在真实浏览器里实测可玩。</a:t>
             </a:r>
           </a:p>
         </p:txBody>
@@ -4078,8 +4078,8 @@
         </p:nvSpPr>
         <p:spPr>
           <a:xfrm>
-            <a:off x="658368" y="4315968"/>
-            <a:ext cx="10874959" cy="713232"/>
+            <a:off x="658368" y="3931920"/>
+            <a:ext cx="10874959" cy="621792"/>
           </a:xfrm>
           <a:prstGeom prst="roundRect">
             <a:avLst/>
@@ -4124,8 +4124,8 @@
         </p:nvSpPr>
         <p:spPr>
           <a:xfrm>
-            <a:off x="877824" y="4498848"/>
-            <a:ext cx="4023360" cy="365760"/>
+            <a:off x="877824" y="4087368"/>
+            <a:ext cx="4023360" cy="329184"/>
           </a:xfrm>
           <a:prstGeom prst="rect">
             <a:avLst/>
@@ -4144,13 +4144,13 @@
               </a:spcAft>
             </a:pPr>
             <a:r>
-              <a:rPr sz="1400" b="1">
+              <a:rPr sz="1300" b="1">
                 <a:solidFill>
                   <a:srgbClr val="E8E4DC"/>
                 </a:solidFill>
                 <a:latin typeface="Segoe UI"/>
               </a:rPr>
-              <a:t>B · Lux3D 生成 15 个资产</a:t>
+              <a:t>demo 视频</a:t>
             </a:r>
           </a:p>
         </p:txBody>
@@ -4163,8 +4163,8 @@
         </p:nvSpPr>
         <p:spPr>
           <a:xfrm>
-            <a:off x="4956048" y="4517136"/>
-            <a:ext cx="1097280" cy="329184"/>
+            <a:off x="4956048" y="4105656"/>
+            <a:ext cx="1097280" cy="292608"/>
           </a:xfrm>
           <a:prstGeom prst="rect">
             <a:avLst/>
@@ -4185,11 +4185,11 @@
             <a:r>
               <a:rPr sz="1200" b="1">
                 <a:solidFill>
-                  <a:srgbClr val="C23B2E"/>
-                </a:solidFill>
-                <a:latin typeface="Segoe UI"/>
-              </a:rPr>
-              <a:t>待 key</a:t>
+                  <a:srgbClr val="6FA86B"/>
+                </a:solidFill>
+                <a:latin typeface="Segoe UI"/>
+              </a:rPr>
+              <a:t>完成</a:t>
             </a:r>
           </a:p>
         </p:txBody>
@@ -4202,8 +4202,8 @@
         </p:nvSpPr>
         <p:spPr>
           <a:xfrm>
-            <a:off x="6144768" y="4517136"/>
-            <a:ext cx="5114239" cy="365760"/>
+            <a:off x="6144768" y="4105656"/>
+            <a:ext cx="5114239" cy="329184"/>
           </a:xfrm>
           <a:prstGeom prst="rect">
             <a:avLst/>
@@ -4228,7 +4228,7 @@
                 </a:solidFill>
                 <a:latin typeface="Segoe UI"/>
               </a:rPr>
-              <a:t>占位模型已就位，游戏完整可玩；生成后按 key 替换即可。</a:t>
+              <a:t>78 秒真实游玩，清过第 1 层。机器无 GPU，帧率受限。</a:t>
             </a:r>
           </a:p>
         </p:txBody>
@@ -4241,8 +4241,8 @@
         </p:nvSpPr>
         <p:spPr>
           <a:xfrm>
-            <a:off x="658368" y="5157216"/>
-            <a:ext cx="10874959" cy="713232"/>
+            <a:off x="658368" y="4645152"/>
+            <a:ext cx="10874959" cy="621792"/>
           </a:xfrm>
           <a:prstGeom prst="roundRect">
             <a:avLst/>
@@ -4287,8 +4287,8 @@
         </p:nvSpPr>
         <p:spPr>
           <a:xfrm>
-            <a:off x="877824" y="5340096"/>
-            <a:ext cx="4023360" cy="365760"/>
+            <a:off x="877824" y="4800600"/>
+            <a:ext cx="4023360" cy="329184"/>
           </a:xfrm>
           <a:prstGeom prst="rect">
             <a:avLst/>
@@ -4307,13 +4307,13 @@
               </a:spcAft>
             </a:pPr>
             <a:r>
-              <a:rPr sz="1400" b="1">
+              <a:rPr sz="1300" b="1">
                 <a:solidFill>
                   <a:srgbClr val="E8E4DC"/>
                 </a:solidFill>
                 <a:latin typeface="Segoe UI"/>
               </a:rPr>
-              <a:t>D · 部署 / 报告 / X</a:t>
+              <a:t>B · Lux3D 资产</a:t>
             </a:r>
           </a:p>
         </p:txBody>
@@ -4326,8 +4326,8 @@
         </p:nvSpPr>
         <p:spPr>
           <a:xfrm>
-            <a:off x="4956048" y="5358384"/>
-            <a:ext cx="1097280" cy="329184"/>
+            <a:off x="4956048" y="4818888"/>
+            <a:ext cx="1097280" cy="292608"/>
           </a:xfrm>
           <a:prstGeom prst="rect">
             <a:avLst/>
@@ -4352,7 +4352,7 @@
                 </a:solidFill>
                 <a:latin typeface="Segoe UI"/>
               </a:rPr>
-              <a:t>进行中</a:t>
+              <a:t>待生成</a:t>
             </a:r>
           </a:p>
         </p:txBody>
@@ -4365,8 +4365,8 @@
         </p:nvSpPr>
         <p:spPr>
           <a:xfrm>
-            <a:off x="6144768" y="5358384"/>
-            <a:ext cx="5114239" cy="365760"/>
+            <a:off x="6144768" y="4818888"/>
+            <a:ext cx="5114239" cy="329184"/>
           </a:xfrm>
           <a:prstGeom prst="rect">
             <a:avLst/>
@@ -4391,7 +4391,170 @@
                 </a:solidFill>
                 <a:latin typeface="Segoe UI"/>
               </a:rPr>
-              <a:t>本报告即其一。部署与发帖需要账号。</a:t>
+              <a:t>两条接入路径都已就绪并验证；占位模型保证游戏完整可玩。</a:t>
+            </a:r>
+          </a:p>
+        </p:txBody>
+      </p:sp>
+      <p:sp>
+        <p:nvSpPr>
+          <p:cNvPr id="27" name="Rounded Rectangle 26"/>
+          <p:cNvSpPr/>
+          <p:nvPr/>
+        </p:nvSpPr>
+        <p:spPr>
+          <a:xfrm>
+            <a:off x="658368" y="5358384"/>
+            <a:ext cx="10874959" cy="621792"/>
+          </a:xfrm>
+          <a:prstGeom prst="roundRect">
+            <a:avLst/>
+          </a:prstGeom>
+          <a:solidFill>
+            <a:srgbClr val="161518"/>
+          </a:solidFill>
+          <a:ln>
+            <a:solidFill>
+              <a:srgbClr val="2C2A2E"/>
+            </a:solidFill>
+          </a:ln>
+          <a:effectLst/>
+        </p:spPr>
+        <p:style>
+          <a:lnRef idx="1">
+            <a:schemeClr val="accent1"/>
+          </a:lnRef>
+          <a:fillRef idx="3">
+            <a:schemeClr val="accent1"/>
+          </a:fillRef>
+          <a:effectRef idx="2">
+            <a:schemeClr val="accent1"/>
+          </a:effectRef>
+          <a:fontRef idx="minor">
+            <a:schemeClr val="lt1"/>
+          </a:fontRef>
+        </p:style>
+        <p:txBody>
+          <a:bodyPr rtlCol="0" anchor="ctr"/>
+          <a:lstStyle/>
+          <a:p>
+            <a:pPr algn="ctr"/>
+          </a:p>
+        </p:txBody>
+      </p:sp>
+      <p:sp>
+        <p:nvSpPr>
+          <p:cNvPr id="28" name="TextBox 27"/>
+          <p:cNvSpPr txBox="1"/>
+          <p:nvPr/>
+        </p:nvSpPr>
+        <p:spPr>
+          <a:xfrm>
+            <a:off x="877824" y="5513832"/>
+            <a:ext cx="4023360" cy="329184"/>
+          </a:xfrm>
+          <a:prstGeom prst="rect">
+            <a:avLst/>
+          </a:prstGeom>
+          <a:noFill/>
+        </p:spPr>
+        <p:txBody>
+          <a:bodyPr wrap="square">
+            <a:spAutoFit/>
+          </a:bodyPr>
+          <a:lstStyle/>
+          <a:p>
+            <a:pPr algn="l">
+              <a:spcAft>
+                <a:spcPts val="0"/>
+              </a:spcAft>
+            </a:pPr>
+            <a:r>
+              <a:rPr sz="1300" b="1">
+                <a:solidFill>
+                  <a:srgbClr val="E8E4DC"/>
+                </a:solidFill>
+                <a:latin typeface="Segoe UI"/>
+              </a:rPr>
+              <a:t>X 发帖</a:t>
+            </a:r>
+          </a:p>
+        </p:txBody>
+      </p:sp>
+      <p:sp>
+        <p:nvSpPr>
+          <p:cNvPr id="29" name="TextBox 28"/>
+          <p:cNvSpPr txBox="1"/>
+          <p:nvPr/>
+        </p:nvSpPr>
+        <p:spPr>
+          <a:xfrm>
+            <a:off x="4956048" y="5532120"/>
+            <a:ext cx="1097280" cy="292608"/>
+          </a:xfrm>
+          <a:prstGeom prst="rect">
+            <a:avLst/>
+          </a:prstGeom>
+          <a:noFill/>
+        </p:spPr>
+        <p:txBody>
+          <a:bodyPr wrap="square">
+            <a:spAutoFit/>
+          </a:bodyPr>
+          <a:lstStyle/>
+          <a:p>
+            <a:pPr algn="l">
+              <a:spcAft>
+                <a:spcPts val="0"/>
+              </a:spcAft>
+            </a:pPr>
+            <a:r>
+              <a:rPr sz="1200" b="1">
+                <a:solidFill>
+                  <a:srgbClr val="C23B2E"/>
+                </a:solidFill>
+                <a:latin typeface="Segoe UI"/>
+              </a:rPr>
+              <a:t>待发</a:t>
+            </a:r>
+          </a:p>
+        </p:txBody>
+      </p:sp>
+      <p:sp>
+        <p:nvSpPr>
+          <p:cNvPr id="30" name="TextBox 29"/>
+          <p:cNvSpPr txBox="1"/>
+          <p:nvPr/>
+        </p:nvSpPr>
+        <p:spPr>
+          <a:xfrm>
+            <a:off x="6144768" y="5532120"/>
+            <a:ext cx="5114239" cy="329184"/>
+          </a:xfrm>
+          <a:prstGeom prst="rect">
+            <a:avLst/>
+          </a:prstGeom>
+          <a:noFill/>
+        </p:spPr>
+        <p:txBody>
+          <a:bodyPr wrap="square">
+            <a:spAutoFit/>
+          </a:bodyPr>
+          <a:lstStyle/>
+          <a:p>
+            <a:pPr algn="l">
+              <a:spcAft>
+                <a:spcPts val="0"/>
+              </a:spcAft>
+            </a:pPr>
+            <a:r>
+              <a:rPr sz="1100" b="0">
+                <a:solidFill>
+                  <a:srgbClr val="9A9488"/>
+                </a:solidFill>
+                <a:latin typeface="Segoe UI"/>
+              </a:rPr>
+              <a:t>文案已备好，对传播分（5%）。需要账号。</a:t>
             </a:r>
           </a:p>
         </p:txBody>
@@ -6952,7 +7115,7 @@
         <p:spPr>
           <a:xfrm>
             <a:off x="658368" y="1792224"/>
-            <a:ext cx="10874959" cy="896112"/>
+            <a:ext cx="10874959" cy="749808"/>
           </a:xfrm>
           <a:prstGeom prst="roundRect">
             <a:avLst/>
@@ -6997,8 +7160,8 @@
         </p:nvSpPr>
         <p:spPr>
           <a:xfrm>
-            <a:off x="896112" y="1901952"/>
-            <a:ext cx="3200400" cy="365760"/>
+            <a:off x="896112" y="1874520"/>
+            <a:ext cx="3200400" cy="329184"/>
           </a:xfrm>
           <a:prstGeom prst="rect">
             <a:avLst/>
@@ -7017,7 +7180,7 @@
               </a:spcAft>
             </a:pPr>
             <a:r>
-              <a:rPr sz="1500" b="1">
+              <a:rPr sz="1400" b="1">
                 <a:solidFill>
                   <a:srgbClr val="E8E4DC"/>
                 </a:solidFill>
@@ -7036,8 +7199,8 @@
         </p:nvSpPr>
         <p:spPr>
           <a:xfrm>
-            <a:off x="896112" y="2267712"/>
-            <a:ext cx="3200400" cy="310896"/>
+            <a:off x="896112" y="2212848"/>
+            <a:ext cx="3200400" cy="274320"/>
           </a:xfrm>
           <a:prstGeom prst="rect">
             <a:avLst/>
@@ -7056,13 +7219,13 @@
               </a:spcAft>
             </a:pPr>
             <a:r>
-              <a:rPr sz="1100" b="0">
+              <a:rPr sz="1000" b="0">
                 <a:solidFill>
                   <a:srgbClr val="C23B2E"/>
                 </a:solidFill>
                 <a:latin typeface="Segoe UI"/>
               </a:rPr>
-              <a:t>文生 3D</a:t>
+              <a:t>文生 3D · 必需</a:t>
             </a:r>
           </a:p>
         </p:txBody>
@@ -7075,7 +7238,7 @@
         </p:nvSpPr>
         <p:spPr>
           <a:xfrm>
-            <a:off x="4315968" y="2048256"/>
+            <a:off x="4315968" y="1975104"/>
             <a:ext cx="6943039" cy="548640"/>
           </a:xfrm>
           <a:prstGeom prst="rect">
@@ -7095,13 +7258,13 @@
               </a:spcAft>
             </a:pPr>
             <a:r>
-              <a:rPr sz="1300" b="0">
+              <a:rPr sz="1200" b="0">
                 <a:solidFill>
                   <a:srgbClr val="9A9488"/>
                 </a:solidFill>
                 <a:latin typeface="Segoe UI"/>
               </a:rPr>
-              <a:t>全部异物资产的唯一来源。运行时按 key 替换占位模型。</a:t>
+              <a:t>异物资产的唯一来源。两条接入路径：Open API 批处理，或网页版导出后导入。</a:t>
             </a:r>
           </a:p>
         </p:txBody>
@@ -7114,8 +7277,8 @@
         </p:nvSpPr>
         <p:spPr>
           <a:xfrm>
-            <a:off x="658368" y="2834639"/>
-            <a:ext cx="10874959" cy="896112"/>
+            <a:off x="658368" y="2660904"/>
+            <a:ext cx="10874959" cy="749808"/>
           </a:xfrm>
           <a:prstGeom prst="roundRect">
             <a:avLst/>
@@ -7160,8 +7323,8 @@
         </p:nvSpPr>
         <p:spPr>
           <a:xfrm>
-            <a:off x="896112" y="2944367"/>
-            <a:ext cx="3200400" cy="365760"/>
+            <a:off x="896112" y="2743200"/>
+            <a:ext cx="3200400" cy="329184"/>
           </a:xfrm>
           <a:prstGeom prst="rect">
             <a:avLst/>
@@ -7180,13 +7343,13 @@
               </a:spcAft>
             </a:pPr>
             <a:r>
-              <a:rPr sz="1500" b="1">
+              <a:rPr sz="1400" b="1">
                 <a:solidFill>
                   <a:srgbClr val="E8E4DC"/>
                 </a:solidFill>
                 <a:latin typeface="Segoe UI"/>
               </a:rPr>
-              <a:t>@manycore/aholo-viewer</a:t>
+              <a:t>Aholo Open API</a:t>
             </a:r>
           </a:p>
         </p:txBody>
@@ -7199,8 +7362,8 @@
         </p:nvSpPr>
         <p:spPr>
           <a:xfrm>
-            <a:off x="896112" y="3310127"/>
-            <a:ext cx="3200400" cy="310896"/>
+            <a:off x="896112" y="3081528"/>
+            <a:ext cx="3200400" cy="274320"/>
           </a:xfrm>
           <a:prstGeom prst="rect">
             <a:avLst/>
@@ -7219,13 +7382,13 @@
               </a:spcAft>
             </a:pPr>
             <a:r>
-              <a:rPr sz="1100" b="0">
+              <a:rPr sz="1000" b="0">
                 <a:solidFill>
                   <a:srgbClr val="C23B2E"/>
                 </a:solidFill>
                 <a:latin typeface="Segoe UI"/>
               </a:rPr>
-              <a:t>3DGS 渲染</a:t>
+              <a:t>REST · 已对真实接口验证</a:t>
             </a:r>
           </a:p>
         </p:txBody>
@@ -7238,7 +7401,7 @@
         </p:nvSpPr>
         <p:spPr>
           <a:xfrm>
-            <a:off x="4315968" y="3090671"/>
+            <a:off x="4315968" y="2843784"/>
             <a:ext cx="6943039" cy="548640"/>
           </a:xfrm>
           <a:prstGeom prst="rect">
@@ -7258,13 +7421,13 @@
               </a:spcAft>
             </a:pPr>
             <a:r>
-              <a:rPr sz="1300" b="0">
+              <a:rPr sz="1200" b="0">
                 <a:solidFill>
                   <a:srgbClr val="9A9488"/>
                 </a:solidFill>
                 <a:latin typeface="Segoe UI"/>
               </a:rPr>
-              <a:t>在浏览器里渲染真实重建的房间，第一人称行走。</a:t>
+              <a:t>创建 → 轮询 → 立刻下载（结果 URL 2 小时过期）。认证头与错误映射已实测。</a:t>
             </a:r>
           </a:p>
         </p:txBody>
@@ -7277,8 +7440,8 @@
         </p:nvSpPr>
         <p:spPr>
           <a:xfrm>
-            <a:off x="658368" y="3877055"/>
-            <a:ext cx="10874959" cy="896112"/>
+            <a:off x="658368" y="3529584"/>
+            <a:ext cx="10874959" cy="749808"/>
           </a:xfrm>
           <a:prstGeom prst="roundRect">
             <a:avLst/>
@@ -7323,8 +7486,8 @@
         </p:nvSpPr>
         <p:spPr>
           <a:xfrm>
-            <a:off x="896112" y="3986783"/>
-            <a:ext cx="3200400" cy="365760"/>
+            <a:off x="896112" y="3611880"/>
+            <a:ext cx="3200400" cy="329184"/>
           </a:xfrm>
           <a:prstGeom prst="rect">
             <a:avLst/>
@@ -7343,13 +7506,13 @@
               </a:spcAft>
             </a:pPr>
             <a:r>
-              <a:rPr sz="1500" b="1">
+              <a:rPr sz="1400" b="1">
                 <a:solidFill>
                   <a:srgbClr val="E8E4DC"/>
                 </a:solidFill>
                 <a:latin typeface="Segoe UI"/>
               </a:rPr>
-              <a:t>官方开源 3DGS 场景</a:t>
+              <a:t>@manycore/aholo-viewer</a:t>
             </a:r>
           </a:p>
         </p:txBody>
@@ -7362,8 +7525,8 @@
         </p:nvSpPr>
         <p:spPr>
           <a:xfrm>
-            <a:off x="896112" y="4352543"/>
-            <a:ext cx="3200400" cy="310896"/>
+            <a:off x="896112" y="3950208"/>
+            <a:ext cx="3200400" cy="274320"/>
           </a:xfrm>
           <a:prstGeom prst="rect">
             <a:avLst/>
@@ -7382,13 +7545,13 @@
               </a:spcAft>
             </a:pPr>
             <a:r>
-              <a:rPr sz="1100" b="0">
+              <a:rPr sz="1000" b="0">
                 <a:solidFill>
                   <a:srgbClr val="C23B2E"/>
                 </a:solidFill>
                 <a:latin typeface="Segoe UI"/>
               </a:rPr>
-              <a:t>scene.7c26e842.spz</a:t>
+              <a:t>3DGS 渲染</a:t>
             </a:r>
           </a:p>
         </p:txBody>
@@ -7401,7 +7564,7 @@
         </p:nvSpPr>
         <p:spPr>
           <a:xfrm>
-            <a:off x="4315968" y="4133087"/>
+            <a:off x="4315968" y="3712464"/>
             <a:ext cx="6943039" cy="548640"/>
           </a:xfrm>
           <a:prstGeom prst="rect">
@@ -7421,13 +7584,13 @@
               </a:spcAft>
             </a:pPr>
             <a:r>
-              <a:rPr sz="1300" b="0">
+              <a:rPr sz="1200" b="0">
                 <a:solidFill>
                   <a:srgbClr val="9A9488"/>
                 </a:solidFill>
                 <a:latin typeface="Segoe UI"/>
               </a:rPr>
-              <a:t>63 MB 室内高斯泼溅场景，运行时流式加载。</a:t>
+              <a:t>在浏览器里渲染真实重建的房间，第一人称行走。</a:t>
             </a:r>
           </a:p>
         </p:txBody>
@@ -7440,8 +7603,8 @@
         </p:nvSpPr>
         <p:spPr>
           <a:xfrm>
-            <a:off x="658368" y="4919472"/>
-            <a:ext cx="10874959" cy="896112"/>
+            <a:off x="658368" y="4398263"/>
+            <a:ext cx="10874959" cy="749808"/>
           </a:xfrm>
           <a:prstGeom prst="roundRect">
             <a:avLst/>
@@ -7486,8 +7649,8 @@
         </p:nvSpPr>
         <p:spPr>
           <a:xfrm>
-            <a:off x="896112" y="5029200"/>
-            <a:ext cx="3200400" cy="365760"/>
+            <a:off x="896112" y="4480559"/>
+            <a:ext cx="3200400" cy="329184"/>
           </a:xfrm>
           <a:prstGeom prst="rect">
             <a:avLst/>
@@ -7506,13 +7669,13 @@
               </a:spcAft>
             </a:pPr>
             <a:r>
-              <a:rPr sz="1500" b="1">
+              <a:rPr sz="1400" b="1">
                 <a:solidFill>
                   <a:srgbClr val="E8E4DC"/>
                 </a:solidFill>
                 <a:latin typeface="Segoe UI"/>
               </a:rPr>
-              <a:t>官方体素碰撞场</a:t>
+              <a:t>官方开源 3DGS 场景</a:t>
             </a:r>
           </a:p>
         </p:txBody>
@@ -7525,8 +7688,8 @@
         </p:nvSpPr>
         <p:spPr>
           <a:xfrm>
-            <a:off x="896112" y="5394960"/>
-            <a:ext cx="3200400" cy="310896"/>
+            <a:off x="896112" y="4818887"/>
+            <a:ext cx="3200400" cy="274320"/>
           </a:xfrm>
           <a:prstGeom prst="rect">
             <a:avLst/>
@@ -7545,13 +7708,13 @@
               </a:spcAft>
             </a:pPr>
             <a:r>
-              <a:rPr sz="1100" b="0">
+              <a:rPr sz="1000" b="0">
                 <a:solidFill>
                   <a:srgbClr val="C23B2E"/>
                 </a:solidFill>
                 <a:latin typeface="Segoe UI"/>
               </a:rPr>
-              <a:t>collision.voxel.bin</a:t>
+              <a:t>scene.7c26e842.spz</a:t>
             </a:r>
           </a:p>
         </p:txBody>
@@ -7564,7 +7727,7 @@
         </p:nvSpPr>
         <p:spPr>
           <a:xfrm>
-            <a:off x="4315968" y="5175504"/>
+            <a:off x="4315968" y="4581143"/>
             <a:ext cx="6943039" cy="548640"/>
           </a:xfrm>
           <a:prstGeom prst="rect">
@@ -7584,7 +7747,170 @@
               </a:spcAft>
             </a:pPr>
             <a:r>
-              <a:rPr sz="1300" b="0">
+              <a:rPr sz="1200" b="0">
+                <a:solidFill>
+                  <a:srgbClr val="9A9488"/>
+                </a:solidFill>
+                <a:latin typeface="Segoe UI"/>
+              </a:rPr>
+              <a:t>63 MB 室内高斯泼溅场景，运行时流式加载。</a:t>
+            </a:r>
+          </a:p>
+        </p:txBody>
+      </p:sp>
+      <p:sp>
+        <p:nvSpPr>
+          <p:cNvPr id="23" name="Rounded Rectangle 22"/>
+          <p:cNvSpPr/>
+          <p:nvPr/>
+        </p:nvSpPr>
+        <p:spPr>
+          <a:xfrm>
+            <a:off x="658368" y="5266944"/>
+            <a:ext cx="10874959" cy="749808"/>
+          </a:xfrm>
+          <a:prstGeom prst="roundRect">
+            <a:avLst/>
+          </a:prstGeom>
+          <a:solidFill>
+            <a:srgbClr val="161518"/>
+          </a:solidFill>
+          <a:ln>
+            <a:solidFill>
+              <a:srgbClr val="2C2A2E"/>
+            </a:solidFill>
+          </a:ln>
+          <a:effectLst/>
+        </p:spPr>
+        <p:style>
+          <a:lnRef idx="1">
+            <a:schemeClr val="accent1"/>
+          </a:lnRef>
+          <a:fillRef idx="3">
+            <a:schemeClr val="accent1"/>
+          </a:fillRef>
+          <a:effectRef idx="2">
+            <a:schemeClr val="accent1"/>
+          </a:effectRef>
+          <a:fontRef idx="minor">
+            <a:schemeClr val="lt1"/>
+          </a:fontRef>
+        </p:style>
+        <p:txBody>
+          <a:bodyPr rtlCol="0" anchor="ctr"/>
+          <a:lstStyle/>
+          <a:p>
+            <a:pPr algn="ctr"/>
+          </a:p>
+        </p:txBody>
+      </p:sp>
+      <p:sp>
+        <p:nvSpPr>
+          <p:cNvPr id="24" name="TextBox 23"/>
+          <p:cNvSpPr txBox="1"/>
+          <p:nvPr/>
+        </p:nvSpPr>
+        <p:spPr>
+          <a:xfrm>
+            <a:off x="896112" y="5349240"/>
+            <a:ext cx="3200400" cy="329184"/>
+          </a:xfrm>
+          <a:prstGeom prst="rect">
+            <a:avLst/>
+          </a:prstGeom>
+          <a:noFill/>
+        </p:spPr>
+        <p:txBody>
+          <a:bodyPr wrap="square">
+            <a:spAutoFit/>
+          </a:bodyPr>
+          <a:lstStyle/>
+          <a:p>
+            <a:pPr algn="l">
+              <a:spcAft>
+                <a:spcPts val="0"/>
+              </a:spcAft>
+            </a:pPr>
+            <a:r>
+              <a:rPr sz="1400" b="1">
+                <a:solidFill>
+                  <a:srgbClr val="E8E4DC"/>
+                </a:solidFill>
+                <a:latin typeface="Segoe UI"/>
+              </a:rPr>
+              <a:t>官方体素碰撞场</a:t>
+            </a:r>
+          </a:p>
+        </p:txBody>
+      </p:sp>
+      <p:sp>
+        <p:nvSpPr>
+          <p:cNvPr id="25" name="TextBox 24"/>
+          <p:cNvSpPr txBox="1"/>
+          <p:nvPr/>
+        </p:nvSpPr>
+        <p:spPr>
+          <a:xfrm>
+            <a:off x="896112" y="5687568"/>
+            <a:ext cx="3200400" cy="274320"/>
+          </a:xfrm>
+          <a:prstGeom prst="rect">
+            <a:avLst/>
+          </a:prstGeom>
+          <a:noFill/>
+        </p:spPr>
+        <p:txBody>
+          <a:bodyPr wrap="square">
+            <a:spAutoFit/>
+          </a:bodyPr>
+          <a:lstStyle/>
+          <a:p>
+            <a:pPr algn="l">
+              <a:spcAft>
+                <a:spcPts val="0"/>
+              </a:spcAft>
+            </a:pPr>
+            <a:r>
+              <a:rPr sz="1000" b="0">
+                <a:solidFill>
+                  <a:srgbClr val="C23B2E"/>
+                </a:solidFill>
+                <a:latin typeface="Segoe UI"/>
+              </a:rPr>
+              <a:t>collision.voxel.bin</a:t>
+            </a:r>
+          </a:p>
+        </p:txBody>
+      </p:sp>
+      <p:sp>
+        <p:nvSpPr>
+          <p:cNvPr id="26" name="TextBox 25"/>
+          <p:cNvSpPr txBox="1"/>
+          <p:nvPr/>
+        </p:nvSpPr>
+        <p:spPr>
+          <a:xfrm>
+            <a:off x="4315968" y="5449824"/>
+            <a:ext cx="6943039" cy="548640"/>
+          </a:xfrm>
+          <a:prstGeom prst="rect">
+            <a:avLst/>
+          </a:prstGeom>
+          <a:noFill/>
+        </p:spPr>
+        <p:txBody>
+          <a:bodyPr wrap="square">
+            <a:spAutoFit/>
+          </a:bodyPr>
+          <a:lstStyle/>
+          <a:p>
+            <a:pPr algn="l">
+              <a:spcAft>
+                <a:spcPts val="0"/>
+              </a:spcAft>
+            </a:pPr>
+            <a:r>
+              <a:rPr sz="1200" b="0">
                 <a:solidFill>
                   <a:srgbClr val="9A9488"/>
                 </a:solidFill>
@@ -8326,7 +8652,7 @@
                 </a:solidFill>
                 <a:latin typeface="Segoe UI"/>
               </a:rPr>
-              <a:t>占位模型 → 相机实测锚点 → 运行时摆放</a:t>
+              <a:t>占位模型 → 相机实测锚点 → Lux3D 生成 → 运行时替换</a:t>
             </a:r>
           </a:p>
         </p:txBody>
@@ -8423,7 +8749,7 @@
         <p:spPr>
           <a:xfrm>
             <a:off x="658368" y="1792224"/>
-            <a:ext cx="5943600" cy="896112"/>
+            <a:ext cx="5943600" cy="676656"/>
           </a:xfrm>
           <a:prstGeom prst="roundRect">
             <a:avLst/>
@@ -8468,8 +8794,8 @@
         </p:nvSpPr>
         <p:spPr>
           <a:xfrm>
-            <a:off x="877824" y="1911096"/>
-            <a:ext cx="5486400" cy="685800"/>
+            <a:off x="877824" y="1883664"/>
+            <a:ext cx="5486400" cy="548640"/>
           </a:xfrm>
           <a:prstGeom prst="rect">
             <a:avLst/>
@@ -8484,11 +8810,11 @@
           <a:p>
             <a:pPr algn="l">
               <a:spcAft>
-                <a:spcPts val="300"/>
-              </a:spcAft>
-            </a:pPr>
-            <a:r>
-              <a:rPr sz="1400" b="1">
+                <a:spcPts val="200"/>
+              </a:spcAft>
+            </a:pPr>
+            <a:r>
+              <a:rPr sz="1300" b="1">
                 <a:solidFill>
                   <a:srgbClr val="E8E4DC"/>
                 </a:solidFill>
@@ -8504,7 +8830,7 @@
               </a:spcAft>
             </a:pPr>
             <a:r>
-              <a:rPr sz="1100" b="0">
+              <a:rPr sz="1000" b="0">
                 <a:solidFill>
                   <a:srgbClr val="9A9488"/>
                 </a:solidFill>
@@ -8523,8 +8849,8 @@
         </p:nvSpPr>
         <p:spPr>
           <a:xfrm>
-            <a:off x="658368" y="2834639"/>
-            <a:ext cx="5943600" cy="896112"/>
+            <a:off x="658368" y="2578608"/>
+            <a:ext cx="5943600" cy="676656"/>
           </a:xfrm>
           <a:prstGeom prst="roundRect">
             <a:avLst/>
@@ -8569,8 +8895,8 @@
         </p:nvSpPr>
         <p:spPr>
           <a:xfrm>
-            <a:off x="877824" y="2953511"/>
-            <a:ext cx="5486400" cy="685800"/>
+            <a:off x="877824" y="2670048"/>
+            <a:ext cx="5486400" cy="548640"/>
           </a:xfrm>
           <a:prstGeom prst="rect">
             <a:avLst/>
@@ -8585,11 +8911,11 @@
           <a:p>
             <a:pPr algn="l">
               <a:spcAft>
-                <a:spcPts val="300"/>
-              </a:spcAft>
-            </a:pPr>
-            <a:r>
-              <a:rPr sz="1400" b="1">
+                <a:spcPts val="200"/>
+              </a:spcAft>
+            </a:pPr>
+            <a:r>
+              <a:rPr sz="1300" b="1">
                 <a:solidFill>
                   <a:srgbClr val="E8E4DC"/>
                 </a:solidFill>
@@ -8605,7 +8931,7 @@
               </a:spcAft>
             </a:pPr>
             <a:r>
-              <a:rPr sz="1100" b="0">
+              <a:rPr sz="1000" b="0">
                 <a:solidFill>
                   <a:srgbClr val="9A9488"/>
                 </a:solidFill>
@@ -8624,8 +8950,8 @@
         </p:nvSpPr>
         <p:spPr>
           <a:xfrm>
-            <a:off x="658368" y="3877055"/>
-            <a:ext cx="5943600" cy="896112"/>
+            <a:off x="658368" y="3364992"/>
+            <a:ext cx="5943600" cy="676656"/>
           </a:xfrm>
           <a:prstGeom prst="roundRect">
             <a:avLst/>
@@ -8670,8 +8996,8 @@
         </p:nvSpPr>
         <p:spPr>
           <a:xfrm>
-            <a:off x="877824" y="3995927"/>
-            <a:ext cx="5486400" cy="685800"/>
+            <a:off x="877824" y="3456432"/>
+            <a:ext cx="5486400" cy="548640"/>
           </a:xfrm>
           <a:prstGeom prst="rect">
             <a:avLst/>
@@ -8686,17 +9012,17 @@
           <a:p>
             <a:pPr algn="l">
               <a:spcAft>
-                <a:spcPts val="300"/>
-              </a:spcAft>
-            </a:pPr>
-            <a:r>
-              <a:rPr sz="1400" b="1">
+                <a:spcPts val="200"/>
+              </a:spcAft>
+            </a:pPr>
+            <a:r>
+              <a:rPr sz="1300" b="1">
                 <a:solidFill>
                   <a:srgbClr val="E8E4DC"/>
                 </a:solidFill>
                 <a:latin typeface="Segoe UI"/>
               </a:rPr>
-              <a:t>3 · 替换</a:t>
+              <a:t>3 · 生成</a:t>
             </a:r>
           </a:p>
           <a:p>
@@ -8706,20 +9032,121 @@
               </a:spcAft>
             </a:pPr>
             <a:r>
-              <a:rPr sz="1100" b="0">
+              <a:rPr sz="1000" b="0">
                 <a:solidFill>
                   <a:srgbClr val="9A9488"/>
                 </a:solidFill>
                 <a:latin typeface="Segoe UI"/>
               </a:rPr>
-              <a:t>Lux3D 资产按同一个 key 放进 public/assets/foreign/，不改动任何玩法逻辑。</a:t>
-            </a:r>
-          </a:p>
-        </p:txBody>
-      </p:sp>
-      <p:sp>
-        <p:nvSpPr>
-          <p:cNvPr id="13" name="Rectangle 12"/>
+              <a:t>Lux3D text-to-3D。有 API key 时 npm run assets:generate 一条命令跑完；没有 key 时用网页版导出，assets:import 校验并归位。</a:t>
+            </a:r>
+          </a:p>
+        </p:txBody>
+      </p:sp>
+      <p:sp>
+        <p:nvSpPr>
+          <p:cNvPr id="13" name="Rounded Rectangle 12"/>
+          <p:cNvSpPr/>
+          <p:nvPr/>
+        </p:nvSpPr>
+        <p:spPr>
+          <a:xfrm>
+            <a:off x="658368" y="4151376"/>
+            <a:ext cx="5943600" cy="676656"/>
+          </a:xfrm>
+          <a:prstGeom prst="roundRect">
+            <a:avLst/>
+          </a:prstGeom>
+          <a:solidFill>
+            <a:srgbClr val="161518"/>
+          </a:solidFill>
+          <a:ln>
+            <a:solidFill>
+              <a:srgbClr val="2C2A2E"/>
+            </a:solidFill>
+          </a:ln>
+          <a:effectLst/>
+        </p:spPr>
+        <p:style>
+          <a:lnRef idx="1">
+            <a:schemeClr val="accent1"/>
+          </a:lnRef>
+          <a:fillRef idx="3">
+            <a:schemeClr val="accent1"/>
+          </a:fillRef>
+          <a:effectRef idx="2">
+            <a:schemeClr val="accent1"/>
+          </a:effectRef>
+          <a:fontRef idx="minor">
+            <a:schemeClr val="lt1"/>
+          </a:fontRef>
+        </p:style>
+        <p:txBody>
+          <a:bodyPr rtlCol="0" anchor="ctr"/>
+          <a:lstStyle/>
+          <a:p>
+            <a:pPr algn="ctr"/>
+          </a:p>
+        </p:txBody>
+      </p:sp>
+      <p:sp>
+        <p:nvSpPr>
+          <p:cNvPr id="14" name="TextBox 13"/>
+          <p:cNvSpPr txBox="1"/>
+          <p:nvPr/>
+        </p:nvSpPr>
+        <p:spPr>
+          <a:xfrm>
+            <a:off x="877824" y="4242816"/>
+            <a:ext cx="5486400" cy="548640"/>
+          </a:xfrm>
+          <a:prstGeom prst="rect">
+            <a:avLst/>
+          </a:prstGeom>
+          <a:noFill/>
+        </p:spPr>
+        <p:txBody>
+          <a:bodyPr wrap="square">
+            <a:spAutoFit/>
+          </a:bodyPr>
+          <a:lstStyle/>
+          <a:p>
+            <a:pPr algn="l">
+              <a:spcAft>
+                <a:spcPts val="200"/>
+              </a:spcAft>
+            </a:pPr>
+            <a:r>
+              <a:rPr sz="1300" b="1">
+                <a:solidFill>
+                  <a:srgbClr val="E8E4DC"/>
+                </a:solidFill>
+                <a:latin typeface="Segoe UI"/>
+              </a:rPr>
+              <a:t>4 · 替换</a:t>
+            </a:r>
+          </a:p>
+          <a:p>
+            <a:pPr algn="l">
+              <a:spcAft>
+                <a:spcPts val="0"/>
+              </a:spcAft>
+            </a:pPr>
+            <a:r>
+              <a:rPr sz="1000" b="0">
+                <a:solidFill>
+                  <a:srgbClr val="9A9488"/>
+                </a:solidFill>
+                <a:latin typeface="Segoe UI"/>
+              </a:rPr>
+              <a:t>同一个 key 放回 public/assets/foreign/ 即自动生效，不改动任何玩法逻辑。来源记在 manifest，assets:check 断言真假。</a:t>
+            </a:r>
+          </a:p>
+        </p:txBody>
+      </p:sp>
+      <p:sp>
+        <p:nvSpPr>
+          <p:cNvPr id="15" name="Rectangle 14"/>
           <p:cNvSpPr/>
           <p:nvPr/>
         </p:nvSpPr>
@@ -8763,7 +9190,7 @@
       </p:sp>
       <p:pic>
         <p:nvPicPr>
-          <p:cNvPr id="14" name="Picture 13" descr="room-glb.png"/>
+          <p:cNvPr id="16" name="Picture 15" descr="room-glb.png"/>
           <p:cNvPicPr>
             <a:picLocks noChangeAspect="1"/>
           </p:cNvPicPr>
@@ -8787,7 +9214,7 @@
       </p:pic>
       <p:sp>
         <p:nvSpPr>
-          <p:cNvPr id="15" name="Rectangle 14"/>
+          <p:cNvPr id="17" name="Rectangle 16"/>
           <p:cNvSpPr/>
           <p:nvPr/>
         </p:nvSpPr>
@@ -8831,7 +9258,7 @@
       </p:sp>
       <p:pic>
         <p:nvPicPr>
-          <p:cNvPr id="16" name="Picture 15" descr="05-watcher.png"/>
+          <p:cNvPr id="18" name="Picture 17" descr="05-watcher.png"/>
           <p:cNvPicPr>
             <a:picLocks noChangeAspect="1"/>
           </p:cNvPicPr>
@@ -9110,7 +9537,7 @@
                 </a:solidFill>
                 <a:latin typeface="Segoe UI"/>
               </a:rPr>
-              <a:t>npm run verify  =  类型检查 → 单测 → 构建 → 三个无头实机验收</a:t>
+              <a:t>npm run verify  =  类型检查 → 单测 → 构建 → 验收，共 161 项断言</a:t>
             </a:r>
           </a:p>
         </p:txBody>
@@ -9124,7 +9551,7 @@
         <p:spPr>
           <a:xfrm>
             <a:off x="658368" y="2286000"/>
-            <a:ext cx="1225296" cy="960120"/>
+            <a:ext cx="1170432" cy="960120"/>
           </a:xfrm>
           <a:prstGeom prst="roundRect">
             <a:avLst/>
@@ -9170,7 +9597,7 @@
         <p:spPr>
           <a:xfrm>
             <a:off x="658368" y="2395728"/>
-            <a:ext cx="1225296" cy="411480"/>
+            <a:ext cx="1170432" cy="411480"/>
           </a:xfrm>
           <a:prstGeom prst="rect">
             <a:avLst/>
@@ -9189,7 +9616,7 @@
               </a:spcAft>
             </a:pPr>
             <a:r>
-              <a:rPr sz="2200" b="1">
+              <a:rPr sz="2000" b="1">
                 <a:solidFill>
                   <a:srgbClr val="E8E4DC"/>
                 </a:solidFill>
@@ -9209,7 +9636,7 @@
         <p:spPr>
           <a:xfrm>
             <a:off x="658368" y="2834640"/>
-            <a:ext cx="1225296" cy="310896"/>
+            <a:ext cx="1170432" cy="310896"/>
           </a:xfrm>
           <a:prstGeom prst="rect">
             <a:avLst/>
@@ -9247,8 +9674,8 @@
         </p:nvSpPr>
         <p:spPr>
           <a:xfrm>
-            <a:off x="2029968" y="2286000"/>
-            <a:ext cx="1225296" cy="960120"/>
+            <a:off x="1956816" y="2286000"/>
+            <a:ext cx="1170432" cy="960120"/>
           </a:xfrm>
           <a:prstGeom prst="roundRect">
             <a:avLst/>
@@ -9293,8 +9720,8 @@
         </p:nvSpPr>
         <p:spPr>
           <a:xfrm>
-            <a:off x="2029968" y="2395728"/>
-            <a:ext cx="1225296" cy="411480"/>
+            <a:off x="1956816" y="2395728"/>
+            <a:ext cx="1170432" cy="411480"/>
           </a:xfrm>
           <a:prstGeom prst="rect">
             <a:avLst/>
@@ -9313,7 +9740,7 @@
               </a:spcAft>
             </a:pPr>
             <a:r>
-              <a:rPr sz="2200" b="1">
+              <a:rPr sz="2000" b="1">
                 <a:solidFill>
                   <a:srgbClr val="E8E4DC"/>
                 </a:solidFill>
@@ -9332,8 +9759,8 @@
         </p:nvSpPr>
         <p:spPr>
           <a:xfrm>
-            <a:off x="2029968" y="2834640"/>
-            <a:ext cx="1225296" cy="310896"/>
+            <a:off x="1956816" y="2834640"/>
+            <a:ext cx="1170432" cy="310896"/>
           </a:xfrm>
           <a:prstGeom prst="rect">
             <a:avLst/>
@@ -9358,7 +9785,7 @@
                 </a:solidFill>
                 <a:latin typeface="Segoe UI"/>
               </a:rPr>
-              <a:t>体素检查</a:t>
+              <a:t>体素</a:t>
             </a:r>
           </a:p>
         </p:txBody>
@@ -9371,8 +9798,8 @@
         </p:nvSpPr>
         <p:spPr>
           <a:xfrm>
-            <a:off x="3401568" y="2286000"/>
-            <a:ext cx="1225296" cy="960120"/>
+            <a:off x="3255264" y="2286000"/>
+            <a:ext cx="1170432" cy="960120"/>
           </a:xfrm>
           <a:prstGeom prst="roundRect">
             <a:avLst/>
@@ -9417,8 +9844,8 @@
         </p:nvSpPr>
         <p:spPr>
           <a:xfrm>
-            <a:off x="3401568" y="2395728"/>
-            <a:ext cx="1225296" cy="411480"/>
+            <a:off x="3255264" y="2395728"/>
+            <a:ext cx="1170432" cy="411480"/>
           </a:xfrm>
           <a:prstGeom prst="rect">
             <a:avLst/>
@@ -9437,13 +9864,13 @@
               </a:spcAft>
             </a:pPr>
             <a:r>
-              <a:rPr sz="2200" b="1">
+              <a:rPr sz="2000" b="1">
                 <a:solidFill>
                   <a:srgbClr val="E8E4DC"/>
                 </a:solidFill>
                 <a:latin typeface="Segoe UI"/>
               </a:rPr>
-              <a:t>5</a:t>
+              <a:t>10</a:t>
             </a:r>
           </a:p>
         </p:txBody>
@@ -9456,8 +9883,8 @@
         </p:nvSpPr>
         <p:spPr>
           <a:xfrm>
-            <a:off x="3401568" y="2834640"/>
-            <a:ext cx="1225296" cy="310896"/>
+            <a:off x="3255264" y="2834640"/>
+            <a:ext cx="1170432" cy="310896"/>
           </a:xfrm>
           <a:prstGeom prst="rect">
             <a:avLst/>
@@ -9482,7 +9909,7 @@
                 </a:solidFill>
                 <a:latin typeface="Segoe UI"/>
               </a:rPr>
-              <a:t>splat/拾取</a:t>
+              <a:t>资产</a:t>
             </a:r>
           </a:p>
         </p:txBody>
@@ -9495,8 +9922,8 @@
         </p:nvSpPr>
         <p:spPr>
           <a:xfrm>
-            <a:off x="4773168" y="2286000"/>
-            <a:ext cx="1225296" cy="960120"/>
+            <a:off x="4553712" y="2286000"/>
+            <a:ext cx="1170432" cy="960120"/>
           </a:xfrm>
           <a:prstGeom prst="roundRect">
             <a:avLst/>
@@ -9541,8 +9968,8 @@
         </p:nvSpPr>
         <p:spPr>
           <a:xfrm>
-            <a:off x="4773168" y="2395728"/>
-            <a:ext cx="1225296" cy="411480"/>
+            <a:off x="4553712" y="2395728"/>
+            <a:ext cx="1170432" cy="411480"/>
           </a:xfrm>
           <a:prstGeom prst="rect">
             <a:avLst/>
@@ -9561,13 +9988,13 @@
               </a:spcAft>
             </a:pPr>
             <a:r>
-              <a:rPr sz="2200" b="1">
+              <a:rPr sz="2000" b="1">
                 <a:solidFill>
                   <a:srgbClr val="E8E4DC"/>
                 </a:solidFill>
                 <a:latin typeface="Segoe UI"/>
               </a:rPr>
-              <a:t>29</a:t>
+              <a:t>5</a:t>
             </a:r>
           </a:p>
         </p:txBody>
@@ -9580,8 +10007,8 @@
         </p:nvSpPr>
         <p:spPr>
           <a:xfrm>
-            <a:off x="4773168" y="2834640"/>
-            <a:ext cx="1225296" cy="310896"/>
+            <a:off x="4553712" y="2834640"/>
+            <a:ext cx="1170432" cy="310896"/>
           </a:xfrm>
           <a:prstGeom prst="rect">
             <a:avLst/>
@@ -9606,7 +10033,7 @@
                 </a:solidFill>
                 <a:latin typeface="Segoe UI"/>
               </a:rPr>
-              <a:t>真实房间</a:t>
+              <a:t>splat</a:t>
             </a:r>
           </a:p>
         </p:txBody>
@@ -9619,8 +10046,8 @@
         </p:nvSpPr>
         <p:spPr>
           <a:xfrm>
-            <a:off x="6144768" y="2286000"/>
-            <a:ext cx="1225296" cy="960120"/>
+            <a:off x="5852160" y="2286000"/>
+            <a:ext cx="1170432" cy="960120"/>
           </a:xfrm>
           <a:prstGeom prst="roundRect">
             <a:avLst/>
@@ -9665,8 +10092,8 @@
         </p:nvSpPr>
         <p:spPr>
           <a:xfrm>
-            <a:off x="6144768" y="2395728"/>
-            <a:ext cx="1225296" cy="411480"/>
+            <a:off x="5852160" y="2395728"/>
+            <a:ext cx="1170432" cy="411480"/>
           </a:xfrm>
           <a:prstGeom prst="rect">
             <a:avLst/>
@@ -9685,13 +10112,13 @@
               </a:spcAft>
             </a:pPr>
             <a:r>
-              <a:rPr sz="2200" b="1">
+              <a:rPr sz="2000" b="1">
                 <a:solidFill>
                   <a:srgbClr val="E8E4DC"/>
                 </a:solidFill>
                 <a:latin typeface="Segoe UI"/>
               </a:rPr>
-              <a:t>15</a:t>
+              <a:t>29</a:t>
             </a:r>
           </a:p>
         </p:txBody>
@@ -9704,8 +10131,8 @@
         </p:nvSpPr>
         <p:spPr>
           <a:xfrm>
-            <a:off x="6144768" y="2834640"/>
-            <a:ext cx="1225296" cy="310896"/>
+            <a:off x="5852160" y="2834640"/>
+            <a:ext cx="1170432" cy="310896"/>
           </a:xfrm>
           <a:prstGeom prst="rect">
             <a:avLst/>
@@ -9730,7 +10157,7 @@
                 </a:solidFill>
                 <a:latin typeface="Segoe UI"/>
               </a:rPr>
-              <a:t>程序化房间</a:t>
+              <a:t>真实房间</a:t>
             </a:r>
           </a:p>
         </p:txBody>
@@ -9743,8 +10170,8 @@
         </p:nvSpPr>
         <p:spPr>
           <a:xfrm>
-            <a:off x="658368" y="3520440"/>
-            <a:ext cx="6675120" cy="768096"/>
+            <a:off x="7150608" y="2286000"/>
+            <a:ext cx="1170432" cy="960120"/>
           </a:xfrm>
           <a:prstGeom prst="roundRect">
             <a:avLst/>
@@ -9789,8 +10216,8 @@
         </p:nvSpPr>
         <p:spPr>
           <a:xfrm>
-            <a:off x="859536" y="3611880"/>
-            <a:ext cx="6309360" cy="621792"/>
+            <a:off x="7150608" y="2395728"/>
+            <a:ext cx="1170432" cy="411480"/>
           </a:xfrm>
           <a:prstGeom prst="rect">
             <a:avLst/>
@@ -9803,49 +10230,72 @@
           </a:bodyPr>
           <a:lstStyle/>
           <a:p>
-            <a:pPr algn="l">
-              <a:spcAft>
-                <a:spcPts val="200"/>
-              </a:spcAft>
-            </a:pPr>
-            <a:r>
-              <a:rPr sz="1300" b="1">
+            <a:pPr algn="ctr">
+              <a:spcAft>
+                <a:spcPts val="0"/>
+              </a:spcAft>
+            </a:pPr>
+            <a:r>
+              <a:rPr sz="2000" b="1">
                 <a:solidFill>
                   <a:srgbClr val="E8E4DC"/>
                 </a:solidFill>
                 <a:latin typeface="Segoe UI"/>
               </a:rPr>
-              <a:t>每条移动断言都带双边界限</a:t>
-            </a:r>
-          </a:p>
-          <a:p>
-            <a:pPr algn="l">
+              <a:t>15</a:t>
+            </a:r>
+          </a:p>
+        </p:txBody>
+      </p:sp>
+      <p:sp>
+        <p:nvSpPr>
+          <p:cNvPr id="25" name="TextBox 24"/>
+          <p:cNvSpPr txBox="1"/>
+          <p:nvPr/>
+        </p:nvSpPr>
+        <p:spPr>
+          <a:xfrm>
+            <a:off x="7150608" y="2834640"/>
+            <a:ext cx="1170432" cy="310896"/>
+          </a:xfrm>
+          <a:prstGeom prst="rect">
+            <a:avLst/>
+          </a:prstGeom>
+          <a:noFill/>
+        </p:spPr>
+        <p:txBody>
+          <a:bodyPr wrap="square">
+            <a:spAutoFit/>
+          </a:bodyPr>
+          <a:lstStyle/>
+          <a:p>
+            <a:pPr algn="ctr">
               <a:spcAft>
                 <a:spcPts val="0"/>
               </a:spcAft>
             </a:pPr>
             <a:r>
-              <a:rPr sz="1100" b="0">
+              <a:rPr sz="1000" b="0">
                 <a:solidFill>
                   <a:srgbClr val="9A9488"/>
                 </a:solidFill>
                 <a:latin typeface="Segoe UI"/>
               </a:rPr>
-              <a:t>「能停住」和「根本没动」无法区分。所以同时断言：有碰撞时走不远，关掉碰撞后必须走得很远。</a:t>
-            </a:r>
-          </a:p>
-        </p:txBody>
-      </p:sp>
-      <p:sp>
-        <p:nvSpPr>
-          <p:cNvPr id="25" name="Rounded Rectangle 24"/>
+              <a:t>程序化</a:t>
+            </a:r>
+          </a:p>
+        </p:txBody>
+      </p:sp>
+      <p:sp>
+        <p:nvSpPr>
+          <p:cNvPr id="26" name="Rounded Rectangle 25"/>
           <p:cNvSpPr/>
           <p:nvPr/>
         </p:nvSpPr>
         <p:spPr>
           <a:xfrm>
-            <a:off x="658368" y="4416552"/>
-            <a:ext cx="6675120" cy="768096"/>
+            <a:off x="8449056" y="2286000"/>
+            <a:ext cx="1170432" cy="960120"/>
           </a:xfrm>
           <a:prstGeom prst="roundRect">
             <a:avLst/>
@@ -9884,14 +10334,14 @@
       </p:sp>
       <p:sp>
         <p:nvSpPr>
-          <p:cNvPr id="26" name="TextBox 25"/>
+          <p:cNvPr id="27" name="TextBox 26"/>
           <p:cNvSpPr txBox="1"/>
           <p:nvPr/>
         </p:nvSpPr>
         <p:spPr>
           <a:xfrm>
-            <a:off x="859536" y="4507992"/>
-            <a:ext cx="6309360" cy="621792"/>
+            <a:off x="8449056" y="2395728"/>
+            <a:ext cx="1170432" cy="411480"/>
           </a:xfrm>
           <a:prstGeom prst="rect">
             <a:avLst/>
@@ -9904,18 +10354,243 @@
           </a:bodyPr>
           <a:lstStyle/>
           <a:p>
+            <a:pPr algn="ctr">
+              <a:spcAft>
+                <a:spcPts val="0"/>
+              </a:spcAft>
+            </a:pPr>
+            <a:r>
+              <a:rPr sz="2000" b="1">
+                <a:solidFill>
+                  <a:srgbClr val="E8E4DC"/>
+                </a:solidFill>
+                <a:latin typeface="Segoe UI"/>
+              </a:rPr>
+              <a:t>7</a:t>
+            </a:r>
+          </a:p>
+        </p:txBody>
+      </p:sp>
+      <p:sp>
+        <p:nvSpPr>
+          <p:cNvPr id="28" name="TextBox 27"/>
+          <p:cNvSpPr txBox="1"/>
+          <p:nvPr/>
+        </p:nvSpPr>
+        <p:spPr>
+          <a:xfrm>
+            <a:off x="8449056" y="2834640"/>
+            <a:ext cx="1170432" cy="310896"/>
+          </a:xfrm>
+          <a:prstGeom prst="rect">
+            <a:avLst/>
+          </a:prstGeom>
+          <a:noFill/>
+        </p:spPr>
+        <p:txBody>
+          <a:bodyPr wrap="square">
+            <a:spAutoFit/>
+          </a:bodyPr>
+          <a:lstStyle/>
+          <a:p>
+            <a:pPr algn="ctr">
+              <a:spcAft>
+                <a:spcPts val="0"/>
+              </a:spcAft>
+            </a:pPr>
+            <a:r>
+              <a:rPr sz="1000" b="0">
+                <a:solidFill>
+                  <a:srgbClr val="9A9488"/>
+                </a:solidFill>
+                <a:latin typeface="Segoe UI"/>
+              </a:rPr>
+              <a:t>部署</a:t>
+            </a:r>
+          </a:p>
+        </p:txBody>
+      </p:sp>
+      <p:sp>
+        <p:nvSpPr>
+          <p:cNvPr id="29" name="Rounded Rectangle 28"/>
+          <p:cNvSpPr/>
+          <p:nvPr/>
+        </p:nvSpPr>
+        <p:spPr>
+          <a:xfrm>
+            <a:off x="658368" y="3456432"/>
+            <a:ext cx="6675120" cy="658368"/>
+          </a:xfrm>
+          <a:prstGeom prst="roundRect">
+            <a:avLst/>
+          </a:prstGeom>
+          <a:solidFill>
+            <a:srgbClr val="161518"/>
+          </a:solidFill>
+          <a:ln>
+            <a:solidFill>
+              <a:srgbClr val="2C2A2E"/>
+            </a:solidFill>
+          </a:ln>
+          <a:effectLst/>
+        </p:spPr>
+        <p:style>
+          <a:lnRef idx="1">
+            <a:schemeClr val="accent1"/>
+          </a:lnRef>
+          <a:fillRef idx="3">
+            <a:schemeClr val="accent1"/>
+          </a:fillRef>
+          <a:effectRef idx="2">
+            <a:schemeClr val="accent1"/>
+          </a:effectRef>
+          <a:fontRef idx="minor">
+            <a:schemeClr val="lt1"/>
+          </a:fontRef>
+        </p:style>
+        <p:txBody>
+          <a:bodyPr rtlCol="0" anchor="ctr"/>
+          <a:lstStyle/>
+          <a:p>
+            <a:pPr algn="ctr"/>
+          </a:p>
+        </p:txBody>
+      </p:sp>
+      <p:sp>
+        <p:nvSpPr>
+          <p:cNvPr id="30" name="TextBox 29"/>
+          <p:cNvSpPr txBox="1"/>
+          <p:nvPr/>
+        </p:nvSpPr>
+        <p:spPr>
+          <a:xfrm>
+            <a:off x="859536" y="3529584"/>
+            <a:ext cx="6309360" cy="548640"/>
+          </a:xfrm>
+          <a:prstGeom prst="rect">
+            <a:avLst/>
+          </a:prstGeom>
+          <a:noFill/>
+        </p:spPr>
+        <p:txBody>
+          <a:bodyPr wrap="square">
+            <a:spAutoFit/>
+          </a:bodyPr>
+          <a:lstStyle/>
+          <a:p>
             <a:pPr algn="l">
               <a:spcAft>
                 <a:spcPts val="200"/>
               </a:spcAft>
             </a:pPr>
             <a:r>
-              <a:rPr sz="1300" b="1">
+              <a:rPr sz="1200" b="1">
                 <a:solidFill>
                   <a:srgbClr val="E8E4DC"/>
                 </a:solidFill>
                 <a:latin typeface="Segoe UI"/>
               </a:rPr>
+              <a:t>每条移动断言都带双边界限</a:t>
+            </a:r>
+          </a:p>
+          <a:p>
+            <a:pPr algn="l">
+              <a:spcAft>
+                <a:spcPts val="0"/>
+              </a:spcAft>
+            </a:pPr>
+            <a:r>
+              <a:rPr sz="1000" b="0">
+                <a:solidFill>
+                  <a:srgbClr val="9A9488"/>
+                </a:solidFill>
+                <a:latin typeface="Segoe UI"/>
+              </a:rPr>
+              <a:t>「能停住」和「根本没动」无法区分。所以同时断言：有碰撞时走不远，关掉碰撞后必须走得很远。</a:t>
+            </a:r>
+          </a:p>
+        </p:txBody>
+      </p:sp>
+      <p:sp>
+        <p:nvSpPr>
+          <p:cNvPr id="31" name="Rounded Rectangle 30"/>
+          <p:cNvSpPr/>
+          <p:nvPr/>
+        </p:nvSpPr>
+        <p:spPr>
+          <a:xfrm>
+            <a:off x="658368" y="4224528"/>
+            <a:ext cx="6675120" cy="658368"/>
+          </a:xfrm>
+          <a:prstGeom prst="roundRect">
+            <a:avLst/>
+          </a:prstGeom>
+          <a:solidFill>
+            <a:srgbClr val="161518"/>
+          </a:solidFill>
+          <a:ln>
+            <a:solidFill>
+              <a:srgbClr val="2C2A2E"/>
+            </a:solidFill>
+          </a:ln>
+          <a:effectLst/>
+        </p:spPr>
+        <p:style>
+          <a:lnRef idx="1">
+            <a:schemeClr val="accent1"/>
+          </a:lnRef>
+          <a:fillRef idx="3">
+            <a:schemeClr val="accent1"/>
+          </a:fillRef>
+          <a:effectRef idx="2">
+            <a:schemeClr val="accent1"/>
+          </a:effectRef>
+          <a:fontRef idx="minor">
+            <a:schemeClr val="lt1"/>
+          </a:fontRef>
+        </p:style>
+        <p:txBody>
+          <a:bodyPr rtlCol="0" anchor="ctr"/>
+          <a:lstStyle/>
+          <a:p>
+            <a:pPr algn="ctr"/>
+          </a:p>
+        </p:txBody>
+      </p:sp>
+      <p:sp>
+        <p:nvSpPr>
+          <p:cNvPr id="32" name="TextBox 31"/>
+          <p:cNvSpPr txBox="1"/>
+          <p:nvPr/>
+        </p:nvSpPr>
+        <p:spPr>
+          <a:xfrm>
+            <a:off x="859536" y="4297680"/>
+            <a:ext cx="6309360" cy="548640"/>
+          </a:xfrm>
+          <a:prstGeom prst="rect">
+            <a:avLst/>
+          </a:prstGeom>
+          <a:noFill/>
+        </p:spPr>
+        <p:txBody>
+          <a:bodyPr wrap="square">
+            <a:spAutoFit/>
+          </a:bodyPr>
+          <a:lstStyle/>
+          <a:p>
+            <a:pPr algn="l">
+              <a:spcAft>
+                <a:spcPts val="200"/>
+              </a:spcAft>
+            </a:pPr>
+            <a:r>
+              <a:rPr sz="1200" b="1">
+                <a:solidFill>
+                  <a:srgbClr val="E8E4DC"/>
+                </a:solidFill>
+                <a:latin typeface="Segoe UI"/>
+              </a:rPr>
               <a:t>对照是必需项</a:t>
             </a:r>
           </a:p>
@@ -9926,7 +10601,7 @@
               </a:spcAft>
             </a:pPr>
             <a:r>
-              <a:rPr sz="1100" b="0">
+              <a:rPr sz="1000" b="0">
                 <a:solidFill>
                   <a:srgbClr val="9A9488"/>
                 </a:solidFill>
@@ -9939,14 +10614,115 @@
       </p:sp>
       <p:sp>
         <p:nvSpPr>
-          <p:cNvPr id="27" name="Rounded Rectangle 26"/>
+          <p:cNvPr id="33" name="Rounded Rectangle 32"/>
           <p:cNvSpPr/>
           <p:nvPr/>
         </p:nvSpPr>
         <p:spPr>
           <a:xfrm>
+            <a:off x="658368" y="4992624"/>
+            <a:ext cx="6675120" cy="658368"/>
+          </a:xfrm>
+          <a:prstGeom prst="roundRect">
+            <a:avLst/>
+          </a:prstGeom>
+          <a:solidFill>
+            <a:srgbClr val="161518"/>
+          </a:solidFill>
+          <a:ln>
+            <a:solidFill>
+              <a:srgbClr val="2C2A2E"/>
+            </a:solidFill>
+          </a:ln>
+          <a:effectLst/>
+        </p:spPr>
+        <p:style>
+          <a:lnRef idx="1">
+            <a:schemeClr val="accent1"/>
+          </a:lnRef>
+          <a:fillRef idx="3">
+            <a:schemeClr val="accent1"/>
+          </a:fillRef>
+          <a:effectRef idx="2">
+            <a:schemeClr val="accent1"/>
+          </a:effectRef>
+          <a:fontRef idx="minor">
+            <a:schemeClr val="lt1"/>
+          </a:fontRef>
+        </p:style>
+        <p:txBody>
+          <a:bodyPr rtlCol="0" anchor="ctr"/>
+          <a:lstStyle/>
+          <a:p>
+            <a:pPr algn="ctr"/>
+          </a:p>
+        </p:txBody>
+      </p:sp>
+      <p:sp>
+        <p:nvSpPr>
+          <p:cNvPr id="34" name="TextBox 33"/>
+          <p:cNvSpPr txBox="1"/>
+          <p:nvPr/>
+        </p:nvSpPr>
+        <p:spPr>
+          <a:xfrm>
+            <a:off x="859536" y="5065776"/>
+            <a:ext cx="6309360" cy="548640"/>
+          </a:xfrm>
+          <a:prstGeom prst="rect">
+            <a:avLst/>
+          </a:prstGeom>
+          <a:noFill/>
+        </p:spPr>
+        <p:txBody>
+          <a:bodyPr wrap="square">
+            <a:spAutoFit/>
+          </a:bodyPr>
+          <a:lstStyle/>
+          <a:p>
+            <a:pPr algn="l">
+              <a:spcAft>
+                <a:spcPts val="200"/>
+              </a:spcAft>
+            </a:pPr>
+            <a:r>
+              <a:rPr sz="1200" b="1">
+                <a:solidFill>
+                  <a:srgbClr val="E8E4DC"/>
+                </a:solidFill>
+                <a:latin typeface="Segoe UI"/>
+              </a:rPr>
+              <a:t>静默失效比崩溃更危险</a:t>
+            </a:r>
+          </a:p>
+          <a:p>
+            <a:pPr algn="l">
+              <a:spcAft>
+                <a:spcPts val="0"/>
+              </a:spcAft>
+            </a:pPr>
+            <a:r>
+              <a:rPr sz="1000" b="0">
+                <a:solidFill>
+                  <a:srgbClr val="9A9488"/>
+                </a:solidFill>
+                <a:latin typeface="Segoe UI"/>
+              </a:rPr>
+              <a:t>「文件存在 = 已生成」让整个 Lux3D 环节变成空操作，且不报错。现在由来源记录判定，并配一条「真资产必须被跳过」的反向断言。</a:t>
+            </a:r>
+          </a:p>
+        </p:txBody>
+      </p:sp>
+      <p:sp>
+        <p:nvSpPr>
+          <p:cNvPr id="35" name="Rounded Rectangle 34"/>
+          <p:cNvSpPr/>
+          <p:nvPr/>
+        </p:nvSpPr>
+        <p:spPr>
+          <a:xfrm>
             <a:off x="7680960" y="2286000"/>
-            <a:ext cx="3840480" cy="3017520"/>
+            <a:ext cx="3840480" cy="3291840"/>
           </a:xfrm>
           <a:prstGeom prst="roundRect">
             <a:avLst/>
@@ -9985,14 +10761,14 @@
       </p:sp>
       <p:sp>
         <p:nvSpPr>
-          <p:cNvPr id="28" name="TextBox 27"/>
+          <p:cNvPr id="36" name="TextBox 35"/>
           <p:cNvSpPr txBox="1"/>
           <p:nvPr/>
         </p:nvSpPr>
         <p:spPr>
           <a:xfrm>
-            <a:off x="7909560" y="2468880"/>
-            <a:ext cx="3429000" cy="2743200"/>
+            <a:off x="7909560" y="2432304"/>
+            <a:ext cx="3429000" cy="3063240"/>
           </a:xfrm>
           <a:prstGeom prst="rect">
             <a:avLst/>
@@ -10007,7 +10783,7 @@
           <a:p>
             <a:pPr algn="l">
               <a:spcAft>
-                <a:spcPts val="600"/>
+                <a:spcPts val="500"/>
               </a:spcAft>
             </a:pPr>
             <a:r>
@@ -10023,49 +10799,49 @@
           <a:p>
             <a:pPr algn="l">
               <a:spcAft>
-                <a:spcPts val="600"/>
-              </a:spcAft>
-            </a:pPr>
-            <a:r>
-              <a:rPr sz="1100" b="0">
+                <a:spcPts val="400"/>
+              </a:spcAft>
+            </a:pPr>
+            <a:r>
+              <a:rPr sz="1000" b="0">
                 <a:solidFill>
                   <a:srgbClr val="9A9488"/>
                 </a:solidFill>
                 <a:latin typeface="Segoe UI"/>
               </a:rPr>
-              <a:t>?autostart=1 直接崩溃：let plan 声明在 autostart 块之后，而这条路径是同步调用，变量还在暂时性死区。</a:t>
+              <a:t>?autostart=1 直接崩溃：let plan 声明在 autostart 块之后，而这条路径是同步调用，变量还在暂时性死区。菜单路径永远碰不到它 —— 按钮回调跑得晚。</a:t>
             </a:r>
           </a:p>
           <a:p>
             <a:pPr algn="l">
               <a:spcAft>
-                <a:spcPts val="600"/>
-              </a:spcAft>
-            </a:pPr>
-            <a:r>
-              <a:rPr sz="1100" b="0">
+                <a:spcPts val="500"/>
+              </a:spcAft>
+            </a:pPr>
+            <a:r>
+              <a:rPr sz="1100" b="1">
+                <a:solidFill>
+                  <a:srgbClr val="E8E4DC"/>
+                </a:solidFill>
+                <a:latin typeface="Segoe UI"/>
+              </a:rPr>
+              <a:t>而演示链接正是评审会点开的东西。</a:t>
+            </a:r>
+          </a:p>
+          <a:p>
+            <a:pPr algn="l">
+              <a:spcAft>
+                <a:spcPts val="0"/>
+              </a:spcAft>
+            </a:pPr>
+            <a:r>
+              <a:rPr sz="1000" b="0">
                 <a:solidFill>
                   <a:srgbClr val="9A9488"/>
                 </a:solidFill>
                 <a:latin typeface="Segoe UI"/>
               </a:rPr>
-              <a:t>菜单路径永远碰不到它 —— 按钮回调跑得晚。只有真的去走演示链接那条捷径才会。</a:t>
-            </a:r>
-          </a:p>
-          <a:p>
-            <a:pPr algn="l">
-              <a:spcAft>
-                <a:spcPts val="0"/>
-              </a:spcAft>
-            </a:pPr>
-            <a:r>
-              <a:rPr sz="1200" b="1">
-                <a:solidFill>
-                  <a:srgbClr val="E8E4DC"/>
-                </a:solidFill>
-                <a:latin typeface="Segoe UI"/>
-              </a:rPr>
-              <a:t>而演示链接正是评审会点开的东西。</a:t>
+              <a:t>另一个相反的例子：低帧率下 setTension 每帧重新锚定指数曲线，收敛变成按帧数而不是按时间，音效滞后好几秒。测试一直红，但红的不是测试写错了。</a:t>
             </a:r>
           </a:p>
         </p:txBody>

--- a/artifacts/report/FOREIGN-report.pptx
+++ b/artifacts/report/FOREIGN-report.pptx
@@ -5960,7 +5960,7 @@
                 </a:solidFill>
                 <a:latin typeface="Segoe UI"/>
               </a:rPr>
-              <a:t>标记任何不可能出现在一个家里的东西</a:t>
+              <a:t>只看它做什么，不看它是什么</a:t>
             </a:r>
           </a:p>
         </p:txBody>
@@ -6057,7 +6057,7 @@
         <p:spPr>
           <a:xfrm>
             <a:off x="658368" y="1792224"/>
-            <a:ext cx="6035040" cy="914400"/>
+            <a:ext cx="6035040" cy="1188720"/>
           </a:xfrm>
           <a:prstGeom prst="rect">
             <a:avLst/>
@@ -6076,7 +6076,7 @@
               </a:spcAft>
             </a:pPr>
             <a:r>
-              <a:rPr sz="1400" b="0">
+              <a:rPr sz="1300" b="0">
                 <a:solidFill>
                   <a:srgbClr val="9A9488"/>
                 </a:solidFill>
@@ -6092,13 +6092,29 @@
               </a:spcAft>
             </a:pPr>
             <a:r>
-              <a:rPr sz="1400" b="0">
+              <a:rPr sz="1300" b="0">
                 <a:solidFill>
                   <a:srgbClr val="9A9488"/>
                 </a:solidFill>
                 <a:latin typeface="Segoe UI"/>
               </a:rPr>
-              <a:t>这条约束砍掉了一整类设计：任何「和之前不一样」的东西都不能用。</a:t>
+              <a:t>甚至不需要判断这东西该不该在这儿：房间里本来就摆着同样奇怪的模型。</a:t>
+            </a:r>
+          </a:p>
+          <a:p>
+            <a:pPr algn="l">
+              <a:spcAft>
+                <a:spcPts val="800"/>
+              </a:spcAft>
+            </a:pPr>
+            <a:r>
+              <a:rPr sz="1300" b="0">
+                <a:solidFill>
+                  <a:srgbClr val="9A9488"/>
+                </a:solidFill>
+                <a:latin typeface="Segoe UI"/>
+              </a:rPr>
+              <a:t>凡是「和上一层不一样」才算的异常，都被砍掉了。</a:t>
             </a:r>
           </a:p>
         </p:txBody>
@@ -6111,7 +6127,7 @@
         </p:nvSpPr>
         <p:spPr>
           <a:xfrm>
-            <a:off x="658368" y="2834640"/>
+            <a:off x="658368" y="2971800"/>
             <a:ext cx="6035040" cy="365760"/>
           </a:xfrm>
           <a:prstGeom prst="rect">
@@ -6137,7 +6153,7 @@
                 </a:solidFill>
                 <a:latin typeface="Segoe UI"/>
               </a:rPr>
-              <a:t>因此删掉了「东西消失了」</a:t>
+              <a:t>所以：异常一定在「动」</a:t>
             </a:r>
           </a:p>
         </p:txBody>
@@ -6150,7 +6166,7 @@
         </p:nvSpPr>
         <p:spPr>
           <a:xfrm>
-            <a:off x="658368" y="3200400"/>
+            <a:off x="658368" y="3337560"/>
             <a:ext cx="6035040" cy="731520"/>
           </a:xfrm>
           <a:prstGeom prst="rect">
@@ -6176,7 +6192,7 @@
                 </a:solidFill>
                 <a:latin typeface="Segoe UI"/>
               </a:rPr>
-              <a:t>它只有在记得原样的前提下才成立。玩家第一次进房间，没有参照物。</a:t>
+              <a:t>在看你、浮起来、变了形、多了几个、倒过来、成群 —— 摆着不动的都是无辜的。</a:t>
             </a:r>
           </a:p>
         </p:txBody>
@@ -6189,7 +6205,7 @@
         </p:nvSpPr>
         <p:spPr>
           <a:xfrm>
-            <a:off x="658368" y="4114800"/>
+            <a:off x="658368" y="4160520"/>
             <a:ext cx="6035040" cy="365760"/>
           </a:xfrm>
           <a:prstGeom prst="rect">
@@ -6215,7 +6231,7 @@
                 </a:solidFill>
                 <a:latin typeface="Segoe UI"/>
               </a:rPr>
-              <a:t>现有 7 种异常</a:t>
+              <a:t>现有 6 种异常</a:t>
             </a:r>
           </a:p>
         </p:txBody>
@@ -6228,7 +6244,7 @@
         </p:nvSpPr>
         <p:spPr>
           <a:xfrm>
-            <a:off x="658368" y="4526280"/>
+            <a:off x="658368" y="4572000"/>
             <a:ext cx="1335024" cy="457200"/>
           </a:xfrm>
           <a:prstGeom prst="roundRect">
@@ -6274,7 +6290,7 @@
         </p:nvSpPr>
         <p:spPr>
           <a:xfrm>
-            <a:off x="658368" y="4617720"/>
+            <a:off x="658368" y="4663440"/>
             <a:ext cx="1335024" cy="292608"/>
           </a:xfrm>
           <a:prstGeom prst="rect">
@@ -6300,7 +6316,7 @@
                 </a:solidFill>
                 <a:latin typeface="Segoe UI"/>
               </a:rPr>
-              <a:t>异物闯入</a:t>
+              <a:t>注视</a:t>
             </a:r>
           </a:p>
         </p:txBody>
@@ -6313,7 +6329,7 @@
         </p:nvSpPr>
         <p:spPr>
           <a:xfrm>
-            <a:off x="2139696" y="4526280"/>
+            <a:off x="2139696" y="4572000"/>
             <a:ext cx="1335024" cy="457200"/>
           </a:xfrm>
           <a:prstGeom prst="roundRect">
@@ -6359,7 +6375,7 @@
         </p:nvSpPr>
         <p:spPr>
           <a:xfrm>
-            <a:off x="2139696" y="4617720"/>
+            <a:off x="2139696" y="4663440"/>
             <a:ext cx="1335024" cy="292608"/>
           </a:xfrm>
           <a:prstGeom prst="rect">
@@ -6385,7 +6401,7 @@
                 </a:solidFill>
                 <a:latin typeface="Segoe UI"/>
               </a:rPr>
-              <a:t>注视</a:t>
+              <a:t>悬浮</a:t>
             </a:r>
           </a:p>
         </p:txBody>
@@ -6398,7 +6414,7 @@
         </p:nvSpPr>
         <p:spPr>
           <a:xfrm>
-            <a:off x="3621024" y="4526280"/>
+            <a:off x="3621024" y="4572000"/>
             <a:ext cx="1335024" cy="457200"/>
           </a:xfrm>
           <a:prstGeom prst="roundRect">
@@ -6444,7 +6460,7 @@
         </p:nvSpPr>
         <p:spPr>
           <a:xfrm>
-            <a:off x="3621024" y="4617720"/>
+            <a:off x="3621024" y="4663440"/>
             <a:ext cx="1335024" cy="292608"/>
           </a:xfrm>
           <a:prstGeom prst="rect">
@@ -6470,7 +6486,7 @@
                 </a:solidFill>
                 <a:latin typeface="Segoe UI"/>
               </a:rPr>
-              <a:t>悬浮</a:t>
+              <a:t>变形</a:t>
             </a:r>
           </a:p>
         </p:txBody>
@@ -6483,7 +6499,7 @@
         </p:nvSpPr>
         <p:spPr>
           <a:xfrm>
-            <a:off x="5102352" y="4526280"/>
+            <a:off x="5102352" y="4572000"/>
             <a:ext cx="1335024" cy="457200"/>
           </a:xfrm>
           <a:prstGeom prst="roundRect">
@@ -6529,7 +6545,7 @@
         </p:nvSpPr>
         <p:spPr>
           <a:xfrm>
-            <a:off x="5102352" y="4617720"/>
+            <a:off x="5102352" y="4663440"/>
             <a:ext cx="1335024" cy="292608"/>
           </a:xfrm>
           <a:prstGeom prst="rect">
@@ -6555,7 +6571,7 @@
                 </a:solidFill>
                 <a:latin typeface="Segoe UI"/>
               </a:rPr>
-              <a:t>变形</a:t>
+              <a:t>复制</a:t>
             </a:r>
           </a:p>
         </p:txBody>
@@ -6568,7 +6584,7 @@
         </p:nvSpPr>
         <p:spPr>
           <a:xfrm>
-            <a:off x="658368" y="5093208"/>
+            <a:off x="658368" y="5138928"/>
             <a:ext cx="1335024" cy="457200"/>
           </a:xfrm>
           <a:prstGeom prst="roundRect">
@@ -6614,7 +6630,7 @@
         </p:nvSpPr>
         <p:spPr>
           <a:xfrm>
-            <a:off x="658368" y="5184648"/>
+            <a:off x="658368" y="5230368"/>
             <a:ext cx="1335024" cy="292608"/>
           </a:xfrm>
           <a:prstGeom prst="rect">
@@ -6640,7 +6656,7 @@
                 </a:solidFill>
                 <a:latin typeface="Segoe UI"/>
               </a:rPr>
-              <a:t>复制</a:t>
+              <a:t>倒挂</a:t>
             </a:r>
           </a:p>
         </p:txBody>
@@ -6653,7 +6669,7 @@
         </p:nvSpPr>
         <p:spPr>
           <a:xfrm>
-            <a:off x="2139696" y="5093208"/>
+            <a:off x="2139696" y="5138928"/>
             <a:ext cx="1335024" cy="457200"/>
           </a:xfrm>
           <a:prstGeom prst="roundRect">
@@ -6699,7 +6715,7 @@
         </p:nvSpPr>
         <p:spPr>
           <a:xfrm>
-            <a:off x="2139696" y="5184648"/>
+            <a:off x="2139696" y="5230368"/>
             <a:ext cx="1335024" cy="292608"/>
           </a:xfrm>
           <a:prstGeom prst="rect">
@@ -6725,67 +6741,21 @@
                 </a:solidFill>
                 <a:latin typeface="Segoe UI"/>
               </a:rPr>
-              <a:t>倒挂</a:t>
-            </a:r>
-          </a:p>
-        </p:txBody>
-      </p:sp>
-      <p:sp>
-        <p:nvSpPr>
-          <p:cNvPr id="23" name="Rounded Rectangle 22"/>
-          <p:cNvSpPr/>
-          <p:nvPr/>
-        </p:nvSpPr>
-        <p:spPr>
-          <a:xfrm>
-            <a:off x="3621024" y="5093208"/>
-            <a:ext cx="1335024" cy="457200"/>
-          </a:xfrm>
-          <a:prstGeom prst="roundRect">
-            <a:avLst/>
-          </a:prstGeom>
-          <a:solidFill>
-            <a:srgbClr val="161518"/>
-          </a:solidFill>
-          <a:ln>
-            <a:solidFill>
-              <a:srgbClr val="2C2A2E"/>
-            </a:solidFill>
-          </a:ln>
-          <a:effectLst/>
-        </p:spPr>
-        <p:style>
-          <a:lnRef idx="1">
-            <a:schemeClr val="accent1"/>
-          </a:lnRef>
-          <a:fillRef idx="3">
-            <a:schemeClr val="accent1"/>
-          </a:fillRef>
-          <a:effectRef idx="2">
-            <a:schemeClr val="accent1"/>
-          </a:effectRef>
-          <a:fontRef idx="minor">
-            <a:schemeClr val="lt1"/>
-          </a:fontRef>
-        </p:style>
-        <p:txBody>
-          <a:bodyPr rtlCol="0" anchor="ctr"/>
-          <a:lstStyle/>
-          <a:p>
-            <a:pPr algn="ctr"/>
-          </a:p>
-        </p:txBody>
-      </p:sp>
-      <p:sp>
-        <p:nvSpPr>
-          <p:cNvPr id="24" name="TextBox 23"/>
+              <a:t>成群</a:t>
+            </a:r>
+          </a:p>
+        </p:txBody>
+      </p:sp>
+      <p:sp>
+        <p:nvSpPr>
+          <p:cNvPr id="23" name="TextBox 22"/>
           <p:cNvSpPr txBox="1"/>
           <p:nvPr/>
         </p:nvSpPr>
         <p:spPr>
           <a:xfrm>
-            <a:off x="3621024" y="5184648"/>
-            <a:ext cx="1335024" cy="292608"/>
+            <a:off x="658368" y="5715000"/>
+            <a:ext cx="6035040" cy="457200"/>
           </a:xfrm>
           <a:prstGeom prst="rect">
             <a:avLst/>
@@ -6798,26 +6768,26 @@
           </a:bodyPr>
           <a:lstStyle/>
           <a:p>
-            <a:pPr algn="ctr">
+            <a:pPr algn="l">
               <a:spcAft>
                 <a:spcPts val="0"/>
               </a:spcAft>
             </a:pPr>
             <a:r>
-              <a:rPr sz="1200" b="0">
-                <a:solidFill>
-                  <a:srgbClr val="E8E4DC"/>
-                </a:solidFill>
-                <a:latin typeface="Segoe UI"/>
-              </a:rPr>
-              <a:t>成群</a:t>
-            </a:r>
-          </a:p>
-        </p:txBody>
-      </p:sp>
-      <p:sp>
-        <p:nvSpPr>
-          <p:cNvPr id="25" name="Rectangle 24"/>
+              <a:rPr sz="1000" b="0">
+                <a:solidFill>
+                  <a:srgbClr val="9A9488"/>
+                </a:solidFill>
+                <a:latin typeface="Segoe UI"/>
+              </a:rPr>
+              <a:t>删掉了「异物闯入」：房间里站着同类无辜物件之后，「它不该在这儿」就不再可判。</a:t>
+            </a:r>
+          </a:p>
+        </p:txBody>
+      </p:sp>
+      <p:sp>
+        <p:nvSpPr>
+          <p:cNvPr id="24" name="Rectangle 23"/>
           <p:cNvSpPr/>
           <p:nvPr/>
         </p:nvSpPr>
@@ -6861,7 +6831,7 @@
       </p:sp>
       <p:pic>
         <p:nvPicPr>
-          <p:cNvPr id="26" name="Picture 25" descr="10-horror-stare.png"/>
+          <p:cNvPr id="25" name="Picture 24" descr="10-horror-stare.png"/>
           <p:cNvPicPr>
             <a:picLocks noChangeAspect="1"/>
           </p:cNvPicPr>
@@ -9537,7 +9507,7 @@
                 </a:solidFill>
                 <a:latin typeface="Segoe UI"/>
               </a:rPr>
-              <a:t>npm run verify  =  类型检查 → 单测 → 构建 → 验收，共 161 项断言</a:t>
+              <a:t>npm run verify  =  类型检查 → 单测 → 构建 → 验收，共 170 项断言，全部通过</a:t>
             </a:r>
           </a:p>
         </p:txBody>
@@ -9622,7 +9592,7 @@
                 </a:solidFill>
                 <a:latin typeface="Segoe UI"/>
               </a:rPr>
-              <a:t>85</a:t>
+              <a:t>91</a:t>
             </a:r>
           </a:p>
         </p:txBody>
@@ -10118,7 +10088,7 @@
                 </a:solidFill>
                 <a:latin typeface="Segoe UI"/>
               </a:rPr>
-              <a:t>29</a:t>
+              <a:t>32</a:t>
             </a:r>
           </a:p>
         </p:txBody>

--- a/artifacts/report/FOREIGN-report.pptx
+++ b/artifacts/report/FOREIGN-report.pptx
@@ -8414,7 +8414,7 @@
                 </a:solidFill>
                 <a:latin typeface="Segoe UI"/>
               </a:rPr>
-              <a:t>不含任何渲染依赖，所以同一套关卡生成逻辑被两个后端使用，也被 85 个单测覆盖。</a:t>
+              <a:t>不含任何渲染依赖，所以同一套关卡生成逻辑被两个后端使用，也被 103 个单测覆盖。</a:t>
             </a:r>
           </a:p>
         </p:txBody>
@@ -9507,7 +9507,7 @@
                 </a:solidFill>
                 <a:latin typeface="Segoe UI"/>
               </a:rPr>
-              <a:t>npm run verify  =  类型检查 → 单测 → 构建 → 验收，共 170 项断言，全部通过</a:t>
+              <a:t>npm run verify  =  类型检查 → 单测 → 构建 → 验收，共 196 项断言，全部通过</a:t>
             </a:r>
           </a:p>
         </p:txBody>
@@ -9592,7 +9592,7 @@
                 </a:solidFill>
                 <a:latin typeface="Segoe UI"/>
               </a:rPr>
-              <a:t>91</a:t>
+              <a:t>103</a:t>
             </a:r>
           </a:p>
         </p:txBody>
@@ -10088,7 +10088,7 @@
                 </a:solidFill>
                 <a:latin typeface="Segoe UI"/>
               </a:rPr>
-              <a:t>32</a:t>
+              <a:t>46</a:t>
             </a:r>
           </a:p>
         </p:txBody>

--- a/artifacts/report/FOREIGN-report.pptx
+++ b/artifacts/report/FOREIGN-report.pptx
@@ -4065,7 +4065,7 @@
                 </a:solidFill>
                 <a:latin typeface="Segoe UI"/>
               </a:rPr>
-              <a:t>cyn-nya.github.io/foreign/ —— 在真实浏览器里实测可玩。</a:t>
+              <a:t>cyn-nya.github.io/foreign/ —— 线上实测 8/8，34 个资产全部就位。</a:t>
             </a:r>
           </a:p>
         </p:txBody>
@@ -4228,7 +4228,7 @@
                 </a:solidFill>
                 <a:latin typeface="Segoe UI"/>
               </a:rPr>
-              <a:t>78 秒真实游玩，清过第 1 层。机器无 GPU，帧率受限。</a:t>
+              <a:t>90 秒 720p。本机每秒不足一帧，录不了实机，故用真实截图合成。</a:t>
             </a:r>
           </a:p>
         </p:txBody>

--- a/artifacts/report/FOREIGN-report.pptx
+++ b/artifacts/report/FOREIGN-report.pptx
@@ -8414,7 +8414,7 @@
                 </a:solidFill>
                 <a:latin typeface="Segoe UI"/>
               </a:rPr>
-              <a:t>不含任何渲染依赖，所以同一套关卡生成逻辑被两个后端使用，也被 103 个单测覆盖。</a:t>
+              <a:t>不含任何渲染依赖，所以同一套关卡生成逻辑被两个后端使用，也被 113 个单测覆盖。</a:t>
             </a:r>
           </a:p>
         </p:txBody>
@@ -9507,7 +9507,7 @@
                 </a:solidFill>
                 <a:latin typeface="Segoe UI"/>
               </a:rPr>
-              <a:t>npm run verify  =  类型检查 → 单测 → 构建 → 验收，共 196 项断言，全部通过</a:t>
+              <a:t>npm run verify  =  类型检查 → 单测 → 构建 → 验收，共 209 项断言，全部通过</a:t>
             </a:r>
           </a:p>
         </p:txBody>
@@ -9592,7 +9592,7 @@
                 </a:solidFill>
                 <a:latin typeface="Segoe UI"/>
               </a:rPr>
-              <a:t>103</a:t>
+              <a:t>113</a:t>
             </a:r>
           </a:p>
         </p:txBody>
@@ -10088,7 +10088,7 @@
                 </a:solidFill>
                 <a:latin typeface="Segoe UI"/>
               </a:rPr>
-              <a:t>46</a:t>
+              <a:t>49</a:t>
             </a:r>
           </a:p>
         </p:txBody>

--- a/artifacts/report/FOREIGN-report.pptx
+++ b/artifacts/report/FOREIGN-report.pptx
@@ -9507,7 +9507,7 @@
                 </a:solidFill>
                 <a:latin typeface="Segoe UI"/>
               </a:rPr>
-              <a:t>npm run verify  =  类型检查 → 单测 → 构建 → 验收，共 209 项断言，全部通过</a:t>
+              <a:t>npm run verify  =  类型检查 → 单测 → 构建 → 验收，共 212 项断言，全部通过</a:t>
             </a:r>
           </a:p>
         </p:txBody>
@@ -10088,7 +10088,7 @@
                 </a:solidFill>
                 <a:latin typeface="Segoe UI"/>
               </a:rPr>
-              <a:t>49</a:t>
+              <a:t>52</a:t>
             </a:r>
           </a:p>
         </p:txBody>

--- a/artifacts/report/FOREIGN-report.pptx
+++ b/artifacts/report/FOREIGN-report.pptx
@@ -8414,7 +8414,7 @@
                 </a:solidFill>
                 <a:latin typeface="Segoe UI"/>
               </a:rPr>
-              <a:t>不含任何渲染依赖，所以同一套关卡生成逻辑被两个后端使用，也被 113 个单测覆盖。</a:t>
+              <a:t>不含任何渲染依赖，所以同一套关卡生成逻辑被两个后端使用，也被 125 个单测覆盖。</a:t>
             </a:r>
           </a:p>
         </p:txBody>
@@ -9507,7 +9507,7 @@
                 </a:solidFill>
                 <a:latin typeface="Segoe UI"/>
               </a:rPr>
-              <a:t>npm run verify  =  类型检查 → 单测 → 构建 → 验收，共 212 项断言，全部通过</a:t>
+              <a:t>npm run verify  =  类型检查 → 单测 → 构建 → 验收，共 224 项断言，全部通过</a:t>
             </a:r>
           </a:p>
         </p:txBody>
@@ -9592,7 +9592,7 @@
                 </a:solidFill>
                 <a:latin typeface="Segoe UI"/>
               </a:rPr>
-              <a:t>113</a:t>
+              <a:t>125</a:t>
             </a:r>
           </a:p>
         </p:txBody>

--- a/artifacts/report/FOREIGN-report.pptx
+++ b/artifacts/report/FOREIGN-report.pptx
@@ -5103,7 +5103,7 @@
                 </a:solidFill>
                 <a:latin typeface="Segoe UI"/>
               </a:rPr>
-              <a:t>在计时结束前找出全部。每层只有 3 次标记机会，标错扣时间与机会。</a:t>
+              <a:t>在计时结束前找出全部。标记正确不扣任何东西；每层 3 次失手额度，标错扣 8 秒。</a:t>
             </a:r>
           </a:p>
           <a:p>
@@ -9507,7 +9507,7 @@
                 </a:solidFill>
                 <a:latin typeface="Segoe UI"/>
               </a:rPr>
-              <a:t>npm run verify  =  类型检查 → 单测 → 构建 → 验收，共 224 项断言，全部通过</a:t>
+              <a:t>npm run verify  =  类型检查 → 单测 → 构建 → 验收，共 234 项断言，全部通过</a:t>
             </a:r>
           </a:p>
         </p:txBody>

--- a/artifacts/report/FOREIGN-report.pptx
+++ b/artifacts/report/FOREIGN-report.pptx
@@ -8414,7 +8414,7 @@
                 </a:solidFill>
                 <a:latin typeface="Segoe UI"/>
               </a:rPr>
-              <a:t>不含任何渲染依赖，所以同一套关卡生成逻辑被两个后端使用，也被 125 个单测覆盖。</a:t>
+              <a:t>不含任何渲染依赖，所以同一套关卡生成逻辑被两个后端使用，也被 134 个单测覆盖。</a:t>
             </a:r>
           </a:p>
         </p:txBody>
@@ -9507,7 +9507,7 @@
                 </a:solidFill>
                 <a:latin typeface="Segoe UI"/>
               </a:rPr>
-              <a:t>npm run verify  =  类型检查 → 单测 → 构建 → 验收，共 234 项断言，全部通过</a:t>
+              <a:t>npm run verify  =  类型检查 → 单测 → 构建 → 验收，共 248 项断言，全部通过</a:t>
             </a:r>
           </a:p>
         </p:txBody>
@@ -9592,7 +9592,7 @@
                 </a:solidFill>
                 <a:latin typeface="Segoe UI"/>
               </a:rPr>
-              <a:t>125</a:t>
+              <a:t>134</a:t>
             </a:r>
           </a:p>
         </p:txBody>
@@ -11048,7 +11048,7 @@
         <p:spPr>
           <a:xfrm>
             <a:off x="658368" y="1792224"/>
-            <a:ext cx="6400800" cy="1188720"/>
+            <a:ext cx="6400800" cy="969264"/>
           </a:xfrm>
           <a:prstGeom prst="roundRect">
             <a:avLst/>
@@ -11093,8 +11093,8 @@
         </p:nvSpPr>
         <p:spPr>
           <a:xfrm>
-            <a:off x="877824" y="1929384"/>
-            <a:ext cx="5943600" cy="914400"/>
+            <a:off x="877824" y="1883664"/>
+            <a:ext cx="5943600" cy="822960"/>
           </a:xfrm>
           <a:prstGeom prst="rect">
             <a:avLst/>
@@ -11109,11 +11109,11 @@
           <a:p>
             <a:pPr algn="l">
               <a:spcAft>
-                <a:spcPts val="400"/>
-              </a:spcAft>
-            </a:pPr>
-            <a:r>
-              <a:rPr sz="1600" b="1">
+                <a:spcPts val="300"/>
+              </a:spcAft>
+            </a:pPr>
+            <a:r>
+              <a:rPr sz="1500" b="1">
                 <a:solidFill>
                   <a:srgbClr val="E8E4DC"/>
                 </a:solidFill>
@@ -11129,7 +11129,7 @@
               </a:spcAft>
             </a:pPr>
             <a:r>
-              <a:rPr sz="1200" b="0">
+              <a:rPr sz="1100" b="0">
                 <a:solidFill>
                   <a:srgbClr val="9A9488"/>
                 </a:solidFill>
@@ -11149,8 +11149,8 @@
         </p:nvSpPr>
         <p:spPr>
           <a:xfrm>
-            <a:off x="658368" y="3163824"/>
-            <a:ext cx="6400800" cy="1188720"/>
+            <a:off x="658368" y="2852928"/>
+            <a:ext cx="6400800" cy="969264"/>
           </a:xfrm>
           <a:prstGeom prst="roundRect">
             <a:avLst/>
@@ -11195,8 +11195,8 @@
         </p:nvSpPr>
         <p:spPr>
           <a:xfrm>
-            <a:off x="877824" y="3300984"/>
-            <a:ext cx="5943600" cy="914400"/>
+            <a:off x="877824" y="2944368"/>
+            <a:ext cx="5943600" cy="822960"/>
           </a:xfrm>
           <a:prstGeom prst="rect">
             <a:avLst/>
@@ -11211,17 +11211,17 @@
           <a:p>
             <a:pPr algn="l">
               <a:spcAft>
-                <a:spcPts val="400"/>
-              </a:spcAft>
-            </a:pPr>
-            <a:r>
-              <a:rPr sz="1600" b="1">
+                <a:spcPts val="300"/>
+              </a:spcAft>
+            </a:pPr>
+            <a:r>
+              <a:rPr sz="1500" b="1">
                 <a:solidFill>
                   <a:srgbClr val="E8E4DC"/>
                 </a:solidFill>
                 <a:latin typeface="Segoe UI"/>
               </a:rPr>
-              <a:t>声音先于视线</a:t>
+              <a:t>四种惊吓，不是一种吓四次</a:t>
             </a:r>
           </a:p>
           <a:p>
@@ -11231,14 +11231,14 @@
               </a:spcAft>
             </a:pPr>
             <a:r>
-              <a:rPr sz="1200" b="0">
+              <a:rPr sz="1100" b="0">
                 <a:solidFill>
                   <a:srgbClr val="9A9488"/>
                 </a:solidFill>
                 <a:latin typeface="Segoe UI"/>
               </a:rPr>
-              <a:t>两个失谐振荡器拍频，经低通滤波。靠近最近异常时音量收紧、滤波打开。
-标记命中是上行音，失手是下行 —— 不用看 HUD 就能分辨。</a:t>
+              <a:t>脸闪 150 ms / 慢慢逼近 420 ms / 全黑并掐掉手电筒 620 ms / 连环两次。
+一个效果换六张脸仍然只是一种惊吓；学乖了的玩家不会再缩脖子。</a:t>
             </a:r>
           </a:p>
         </p:txBody>
@@ -11251,8 +11251,8 @@
         </p:nvSpPr>
         <p:spPr>
           <a:xfrm>
-            <a:off x="658368" y="4672584"/>
-            <a:ext cx="6400800" cy="914400"/>
+            <a:off x="658368" y="3913632"/>
+            <a:ext cx="6400800" cy="969264"/>
           </a:xfrm>
           <a:prstGeom prst="roundRect">
             <a:avLst/>
@@ -11297,8 +11297,8 @@
         </p:nvSpPr>
         <p:spPr>
           <a:xfrm>
-            <a:off x="877824" y="4809744"/>
-            <a:ext cx="5943600" cy="685800"/>
+            <a:off x="877824" y="4005072"/>
+            <a:ext cx="5943600" cy="822960"/>
           </a:xfrm>
           <a:prstGeom prst="rect">
             <a:avLst/>
@@ -11317,6 +11317,108 @@
               </a:spcAft>
             </a:pPr>
             <a:r>
+              <a:rPr sz="1500" b="1">
+                <a:solidFill>
+                  <a:srgbClr val="E8E4DC"/>
+                </a:solidFill>
+                <a:latin typeface="Segoe UI"/>
+              </a:rPr>
+              <a:t>声音先于视线</a:t>
+            </a:r>
+          </a:p>
+          <a:p>
+            <a:pPr algn="l">
+              <a:spcAft>
+                <a:spcPts val="0"/>
+              </a:spcAft>
+            </a:pPr>
+            <a:r>
+              <a:rPr sz="1100" b="0">
+                <a:solidFill>
+                  <a:srgbClr val="9A9488"/>
+                </a:solidFill>
+                <a:latin typeface="Segoe UI"/>
+              </a:rPr>
+              <a:t>两个失谐振荡器拍频，经低通滤波。靠近最近异常时音量收紧、滤波打开。
+标记命中是上行音，失手是下行 —— 不用看 HUD 就能分辨。</a:t>
+            </a:r>
+          </a:p>
+        </p:txBody>
+      </p:sp>
+      <p:sp>
+        <p:nvSpPr>
+          <p:cNvPr id="13" name="Rounded Rectangle 12"/>
+          <p:cNvSpPr/>
+          <p:nvPr/>
+        </p:nvSpPr>
+        <p:spPr>
+          <a:xfrm>
+            <a:off x="658368" y="5102352"/>
+            <a:ext cx="6400800" cy="868680"/>
+          </a:xfrm>
+          <a:prstGeom prst="roundRect">
+            <a:avLst/>
+          </a:prstGeom>
+          <a:solidFill>
+            <a:srgbClr val="161518"/>
+          </a:solidFill>
+          <a:ln>
+            <a:solidFill>
+              <a:srgbClr val="2C2A2E"/>
+            </a:solidFill>
+          </a:ln>
+          <a:effectLst/>
+        </p:spPr>
+        <p:style>
+          <a:lnRef idx="1">
+            <a:schemeClr val="accent1"/>
+          </a:lnRef>
+          <a:fillRef idx="3">
+            <a:schemeClr val="accent1"/>
+          </a:fillRef>
+          <a:effectRef idx="2">
+            <a:schemeClr val="accent1"/>
+          </a:effectRef>
+          <a:fontRef idx="minor">
+            <a:schemeClr val="lt1"/>
+          </a:fontRef>
+        </p:style>
+        <p:txBody>
+          <a:bodyPr rtlCol="0" anchor="ctr"/>
+          <a:lstStyle/>
+          <a:p>
+            <a:pPr algn="ctr"/>
+          </a:p>
+        </p:txBody>
+      </p:sp>
+      <p:sp>
+        <p:nvSpPr>
+          <p:cNvPr id="14" name="TextBox 13"/>
+          <p:cNvSpPr txBox="1"/>
+          <p:nvPr/>
+        </p:nvSpPr>
+        <p:spPr>
+          <a:xfrm>
+            <a:off x="877824" y="5212080"/>
+            <a:ext cx="5943600" cy="658368"/>
+          </a:xfrm>
+          <a:prstGeom prst="rect">
+            <a:avLst/>
+          </a:prstGeom>
+          <a:noFill/>
+        </p:spPr>
+        <p:txBody>
+          <a:bodyPr wrap="square">
+            <a:spAutoFit/>
+          </a:bodyPr>
+          <a:lstStyle/>
+          <a:p>
+            <a:pPr algn="l">
+              <a:spcAft>
+                <a:spcPts val="300"/>
+              </a:spcAft>
+            </a:pPr>
+            <a:r>
               <a:rPr sz="1400" b="1">
                 <a:solidFill>
                   <a:srgbClr val="6FA86B"/>
@@ -11346,7 +11448,7 @@
       </p:sp>
       <p:sp>
         <p:nvSpPr>
-          <p:cNvPr id="13" name="Rectangle 12"/>
+          <p:cNvPr id="15" name="Rectangle 14"/>
           <p:cNvSpPr/>
           <p:nvPr/>
         </p:nvSpPr>
@@ -11390,7 +11492,7 @@
       </p:sp>
       <p:pic>
         <p:nvPicPr>
-          <p:cNvPr id="14" name="Picture 13" descr="04-marked.png"/>
+          <p:cNvPr id="16" name="Picture 15" descr="04-marked.png"/>
           <p:cNvPicPr>
             <a:picLocks noChangeAspect="1"/>
           </p:cNvPicPr>

--- a/artifacts/report/FOREIGN-report.pptx
+++ b/artifacts/report/FOREIGN-report.pptx
@@ -9507,7 +9507,7 @@
                 </a:solidFill>
                 <a:latin typeface="Segoe UI"/>
               </a:rPr>
-              <a:t>npm run verify  =  类型检查 → 单测 → 构建 → 验收，共 248 项断言，全部通过</a:t>
+              <a:t>npm run verify  =  类型检查 → 单测 → 构建 → 验收，共 250 项断言，全部通过</a:t>
             </a:r>
           </a:p>
         </p:txBody>
@@ -9840,7 +9840,7 @@
                 </a:solidFill>
                 <a:latin typeface="Segoe UI"/>
               </a:rPr>
-              <a:t>10</a:t>
+              <a:t>12</a:t>
             </a:r>
           </a:p>
         </p:txBody>

--- a/artifacts/report/FOREIGN-report.pptx
+++ b/artifacts/report/FOREIGN-report.pptx
@@ -3752,7 +3752,7 @@
         </p:nvSpPr>
         <p:spPr>
           <a:xfrm>
-            <a:off x="658368" y="2505456"/>
+            <a:off x="658368" y="2400300"/>
             <a:ext cx="10874959" cy="621792"/>
           </a:xfrm>
           <a:prstGeom prst="roundRect">
@@ -3798,7 +3798,7 @@
         </p:nvSpPr>
         <p:spPr>
           <a:xfrm>
-            <a:off x="877824" y="2660904"/>
+            <a:off x="877824" y="2555748"/>
             <a:ext cx="4023360" cy="329184"/>
           </a:xfrm>
           <a:prstGeom prst="rect">
@@ -3837,7 +3837,7 @@
         </p:nvSpPr>
         <p:spPr>
           <a:xfrm>
-            <a:off x="4956048" y="2679192"/>
+            <a:off x="4956048" y="2574036"/>
             <a:ext cx="1097280" cy="292608"/>
           </a:xfrm>
           <a:prstGeom prst="rect">
@@ -3876,7 +3876,7 @@
         </p:nvSpPr>
         <p:spPr>
           <a:xfrm>
-            <a:off x="6144768" y="2679192"/>
+            <a:off x="6144768" y="2574036"/>
             <a:ext cx="5114239" cy="329184"/>
           </a:xfrm>
           <a:prstGeom prst="rect">
@@ -3902,7 +3902,7 @@
                 </a:solidFill>
                 <a:latin typeface="Segoe UI"/>
               </a:rPr>
-              <a:t>音效、注视者动画、异常类型 5 → 7 种。</a:t>
+              <a:t>异常类型 5 → 7 种；四种惊吓而非一种；黑暗与手电筒逐层递进。</a:t>
             </a:r>
           </a:p>
         </p:txBody>
@@ -3915,7 +3915,7 @@
         </p:nvSpPr>
         <p:spPr>
           <a:xfrm>
-            <a:off x="658368" y="3218688"/>
+            <a:off x="658368" y="3008376"/>
             <a:ext cx="10874959" cy="621792"/>
           </a:xfrm>
           <a:prstGeom prst="roundRect">
@@ -3961,7 +3961,7 @@
         </p:nvSpPr>
         <p:spPr>
           <a:xfrm>
-            <a:off x="877824" y="3374136"/>
+            <a:off x="877824" y="3163824"/>
             <a:ext cx="4023360" cy="329184"/>
           </a:xfrm>
           <a:prstGeom prst="rect">
@@ -3987,7 +3987,7 @@
                 </a:solidFill>
                 <a:latin typeface="Segoe UI"/>
               </a:rPr>
-              <a:t>D · 部署 / 报告</a:t>
+              <a:t>可通关性</a:t>
             </a:r>
           </a:p>
         </p:txBody>
@@ -4000,7 +4000,7 @@
         </p:nvSpPr>
         <p:spPr>
           <a:xfrm>
-            <a:off x="4956048" y="3392424"/>
+            <a:off x="4956048" y="3182112"/>
             <a:ext cx="1097280" cy="292608"/>
           </a:xfrm>
           <a:prstGeom prst="rect">
@@ -4026,7 +4026,7 @@
                 </a:solidFill>
                 <a:latin typeface="Segoe UI"/>
               </a:rPr>
-              <a:t>完成</a:t>
+              <a:t>已实测</a:t>
             </a:r>
           </a:p>
         </p:txBody>
@@ -4039,7 +4039,7 @@
         </p:nvSpPr>
         <p:spPr>
           <a:xfrm>
-            <a:off x="6144768" y="3392424"/>
+            <a:off x="6144768" y="3182112"/>
             <a:ext cx="5114239" cy="329184"/>
           </a:xfrm>
           <a:prstGeom prst="rect">
@@ -4065,7 +4065,7 @@
                 </a:solidFill>
                 <a:latin typeface="Segoe UI"/>
               </a:rPr>
-              <a:t>cyn-nya.github.io/foreign/ —— 线上实测 8/8，34 个资产全部就位。</a:t>
+              <a:t>8/8 层都留出扫视时间；最难的第 8 层剩 92.9 秒。npm run search:time。</a:t>
             </a:r>
           </a:p>
         </p:txBody>
@@ -4078,7 +4078,7 @@
         </p:nvSpPr>
         <p:spPr>
           <a:xfrm>
-            <a:off x="658368" y="3931920"/>
+            <a:off x="658368" y="3616452"/>
             <a:ext cx="10874959" cy="621792"/>
           </a:xfrm>
           <a:prstGeom prst="roundRect">
@@ -4124,7 +4124,7 @@
         </p:nvSpPr>
         <p:spPr>
           <a:xfrm>
-            <a:off x="877824" y="4087368"/>
+            <a:off x="877824" y="3771900"/>
             <a:ext cx="4023360" cy="329184"/>
           </a:xfrm>
           <a:prstGeom prst="rect">
@@ -4150,7 +4150,7 @@
                 </a:solidFill>
                 <a:latin typeface="Segoe UI"/>
               </a:rPr>
-              <a:t>demo 视频</a:t>
+              <a:t>D · 部署 / 报告</a:t>
             </a:r>
           </a:p>
         </p:txBody>
@@ -4163,7 +4163,7 @@
         </p:nvSpPr>
         <p:spPr>
           <a:xfrm>
-            <a:off x="4956048" y="4105656"/>
+            <a:off x="4956048" y="3790188"/>
             <a:ext cx="1097280" cy="292608"/>
           </a:xfrm>
           <a:prstGeom prst="rect">
@@ -4202,7 +4202,7 @@
         </p:nvSpPr>
         <p:spPr>
           <a:xfrm>
-            <a:off x="6144768" y="4105656"/>
+            <a:off x="6144768" y="3790188"/>
             <a:ext cx="5114239" cy="329184"/>
           </a:xfrm>
           <a:prstGeom prst="rect">
@@ -4228,7 +4228,7 @@
                 </a:solidFill>
                 <a:latin typeface="Segoe UI"/>
               </a:rPr>
-              <a:t>90 秒 720p。本机每秒不足一帧，录不了实机，故用真实截图合成。</a:t>
+              <a:t>cyn-nya.github.io/foreign/ —— 线上实测 8/8，34 个资产全部就位。</a:t>
             </a:r>
           </a:p>
         </p:txBody>
@@ -4241,7 +4241,7 @@
         </p:nvSpPr>
         <p:spPr>
           <a:xfrm>
-            <a:off x="658368" y="4645152"/>
+            <a:off x="658368" y="4224528"/>
             <a:ext cx="10874959" cy="621792"/>
           </a:xfrm>
           <a:prstGeom prst="roundRect">
@@ -4287,7 +4287,7 @@
         </p:nvSpPr>
         <p:spPr>
           <a:xfrm>
-            <a:off x="877824" y="4800600"/>
+            <a:off x="877824" y="4379976"/>
             <a:ext cx="4023360" cy="329184"/>
           </a:xfrm>
           <a:prstGeom prst="rect">
@@ -4313,7 +4313,7 @@
                 </a:solidFill>
                 <a:latin typeface="Segoe UI"/>
               </a:rPr>
-              <a:t>B · Lux3D 资产</a:t>
+              <a:t>demo 视频</a:t>
             </a:r>
           </a:p>
         </p:txBody>
@@ -4326,7 +4326,7 @@
         </p:nvSpPr>
         <p:spPr>
           <a:xfrm>
-            <a:off x="4956048" y="4818888"/>
+            <a:off x="4956048" y="4398264"/>
             <a:ext cx="1097280" cy="292608"/>
           </a:xfrm>
           <a:prstGeom prst="rect">
@@ -4348,11 +4348,11 @@
             <a:r>
               <a:rPr sz="1200" b="1">
                 <a:solidFill>
-                  <a:srgbClr val="C23B2E"/>
-                </a:solidFill>
-                <a:latin typeface="Segoe UI"/>
-              </a:rPr>
-              <a:t>待生成</a:t>
+                  <a:srgbClr val="6FA86B"/>
+                </a:solidFill>
+                <a:latin typeface="Segoe UI"/>
+              </a:rPr>
+              <a:t>完成</a:t>
             </a:r>
           </a:p>
         </p:txBody>
@@ -4365,7 +4365,7 @@
         </p:nvSpPr>
         <p:spPr>
           <a:xfrm>
-            <a:off x="6144768" y="4818888"/>
+            <a:off x="6144768" y="4398264"/>
             <a:ext cx="5114239" cy="329184"/>
           </a:xfrm>
           <a:prstGeom prst="rect">
@@ -4391,7 +4391,7 @@
                 </a:solidFill>
                 <a:latin typeface="Segoe UI"/>
               </a:rPr>
-              <a:t>两条接入路径都已就绪并验证；占位模型保证游戏完整可玩。</a:t>
+              <a:t>90 秒 720p。本机每秒不足一帧，录不了实机，故用真实截图合成。</a:t>
             </a:r>
           </a:p>
         </p:txBody>
@@ -4404,7 +4404,7 @@
         </p:nvSpPr>
         <p:spPr>
           <a:xfrm>
-            <a:off x="658368" y="5358384"/>
+            <a:off x="658368" y="4832604"/>
             <a:ext cx="10874959" cy="621792"/>
           </a:xfrm>
           <a:prstGeom prst="roundRect">
@@ -4450,7 +4450,7 @@
         </p:nvSpPr>
         <p:spPr>
           <a:xfrm>
-            <a:off x="877824" y="5513832"/>
+            <a:off x="877824" y="4988052"/>
             <a:ext cx="4023360" cy="329184"/>
           </a:xfrm>
           <a:prstGeom prst="rect">
@@ -4476,7 +4476,7 @@
                 </a:solidFill>
                 <a:latin typeface="Segoe UI"/>
               </a:rPr>
-              <a:t>X 发帖</a:t>
+              <a:t>B · Lux3D 资产</a:t>
             </a:r>
           </a:p>
         </p:txBody>
@@ -4489,7 +4489,7 @@
         </p:nvSpPr>
         <p:spPr>
           <a:xfrm>
-            <a:off x="4956048" y="5532120"/>
+            <a:off x="4956048" y="5006340"/>
             <a:ext cx="1097280" cy="292608"/>
           </a:xfrm>
           <a:prstGeom prst="rect">
@@ -4515,7 +4515,7 @@
                 </a:solidFill>
                 <a:latin typeface="Segoe UI"/>
               </a:rPr>
-              <a:t>待发</a:t>
+              <a:t>待生成</a:t>
             </a:r>
           </a:p>
         </p:txBody>
@@ -4528,7 +4528,170 @@
         </p:nvSpPr>
         <p:spPr>
           <a:xfrm>
-            <a:off x="6144768" y="5532120"/>
+            <a:off x="6144768" y="5006340"/>
+            <a:ext cx="5114239" cy="329184"/>
+          </a:xfrm>
+          <a:prstGeom prst="rect">
+            <a:avLst/>
+          </a:prstGeom>
+          <a:noFill/>
+        </p:spPr>
+        <p:txBody>
+          <a:bodyPr wrap="square">
+            <a:spAutoFit/>
+          </a:bodyPr>
+          <a:lstStyle/>
+          <a:p>
+            <a:pPr algn="l">
+              <a:spcAft>
+                <a:spcPts val="0"/>
+              </a:spcAft>
+            </a:pPr>
+            <a:r>
+              <a:rPr sz="1100" b="0">
+                <a:solidFill>
+                  <a:srgbClr val="9A9488"/>
+                </a:solidFill>
+                <a:latin typeface="Segoe UI"/>
+              </a:rPr>
+              <a:t>14/21 已由 Lux3D 生成，7 个仍是占位；接入已就绪，只缺额度。</a:t>
+            </a:r>
+          </a:p>
+        </p:txBody>
+      </p:sp>
+      <p:sp>
+        <p:nvSpPr>
+          <p:cNvPr id="31" name="Rounded Rectangle 30"/>
+          <p:cNvSpPr/>
+          <p:nvPr/>
+        </p:nvSpPr>
+        <p:spPr>
+          <a:xfrm>
+            <a:off x="658368" y="5440680"/>
+            <a:ext cx="10874959" cy="621792"/>
+          </a:xfrm>
+          <a:prstGeom prst="roundRect">
+            <a:avLst/>
+          </a:prstGeom>
+          <a:solidFill>
+            <a:srgbClr val="161518"/>
+          </a:solidFill>
+          <a:ln>
+            <a:solidFill>
+              <a:srgbClr val="2C2A2E"/>
+            </a:solidFill>
+          </a:ln>
+          <a:effectLst/>
+        </p:spPr>
+        <p:style>
+          <a:lnRef idx="1">
+            <a:schemeClr val="accent1"/>
+          </a:lnRef>
+          <a:fillRef idx="3">
+            <a:schemeClr val="accent1"/>
+          </a:fillRef>
+          <a:effectRef idx="2">
+            <a:schemeClr val="accent1"/>
+          </a:effectRef>
+          <a:fontRef idx="minor">
+            <a:schemeClr val="lt1"/>
+          </a:fontRef>
+        </p:style>
+        <p:txBody>
+          <a:bodyPr rtlCol="0" anchor="ctr"/>
+          <a:lstStyle/>
+          <a:p>
+            <a:pPr algn="ctr"/>
+          </a:p>
+        </p:txBody>
+      </p:sp>
+      <p:sp>
+        <p:nvSpPr>
+          <p:cNvPr id="32" name="TextBox 31"/>
+          <p:cNvSpPr txBox="1"/>
+          <p:nvPr/>
+        </p:nvSpPr>
+        <p:spPr>
+          <a:xfrm>
+            <a:off x="877824" y="5596128"/>
+            <a:ext cx="4023360" cy="329184"/>
+          </a:xfrm>
+          <a:prstGeom prst="rect">
+            <a:avLst/>
+          </a:prstGeom>
+          <a:noFill/>
+        </p:spPr>
+        <p:txBody>
+          <a:bodyPr wrap="square">
+            <a:spAutoFit/>
+          </a:bodyPr>
+          <a:lstStyle/>
+          <a:p>
+            <a:pPr algn="l">
+              <a:spcAft>
+                <a:spcPts val="0"/>
+              </a:spcAft>
+            </a:pPr>
+            <a:r>
+              <a:rPr sz="1300" b="1">
+                <a:solidFill>
+                  <a:srgbClr val="E8E4DC"/>
+                </a:solidFill>
+                <a:latin typeface="Segoe UI"/>
+              </a:rPr>
+              <a:t>X 发帖</a:t>
+            </a:r>
+          </a:p>
+        </p:txBody>
+      </p:sp>
+      <p:sp>
+        <p:nvSpPr>
+          <p:cNvPr id="33" name="TextBox 32"/>
+          <p:cNvSpPr txBox="1"/>
+          <p:nvPr/>
+        </p:nvSpPr>
+        <p:spPr>
+          <a:xfrm>
+            <a:off x="4956048" y="5614416"/>
+            <a:ext cx="1097280" cy="292608"/>
+          </a:xfrm>
+          <a:prstGeom prst="rect">
+            <a:avLst/>
+          </a:prstGeom>
+          <a:noFill/>
+        </p:spPr>
+        <p:txBody>
+          <a:bodyPr wrap="square">
+            <a:spAutoFit/>
+          </a:bodyPr>
+          <a:lstStyle/>
+          <a:p>
+            <a:pPr algn="l">
+              <a:spcAft>
+                <a:spcPts val="0"/>
+              </a:spcAft>
+            </a:pPr>
+            <a:r>
+              <a:rPr sz="1200" b="1">
+                <a:solidFill>
+                  <a:srgbClr val="C23B2E"/>
+                </a:solidFill>
+                <a:latin typeface="Segoe UI"/>
+              </a:rPr>
+              <a:t>待发</a:t>
+            </a:r>
+          </a:p>
+        </p:txBody>
+      </p:sp>
+      <p:sp>
+        <p:nvSpPr>
+          <p:cNvPr id="34" name="TextBox 33"/>
+          <p:cNvSpPr txBox="1"/>
+          <p:nvPr/>
+        </p:nvSpPr>
+        <p:spPr>
+          <a:xfrm>
+            <a:off x="6144768" y="5614416"/>
             <a:ext cx="5114239" cy="329184"/>
           </a:xfrm>
           <a:prstGeom prst="rect">
@@ -9507,7 +9670,7 @@
                 </a:solidFill>
                 <a:latin typeface="Segoe UI"/>
               </a:rPr>
-              <a:t>npm run verify  =  类型检查 → 单测 → 构建 → 验收，共 250 项断言，全部通过</a:t>
+              <a:t>npm run verify  =  类型检查 → 单测 → 构建 → 验收，共 258 项断言，全部通过</a:t>
             </a:r>
           </a:p>
         </p:txBody>

--- a/artifacts/report/FOREIGN-report.pptx
+++ b/artifacts/report/FOREIGN-report.pptx
@@ -8577,7 +8577,7 @@
                 </a:solidFill>
                 <a:latin typeface="Segoe UI"/>
               </a:rPr>
-              <a:t>不含任何渲染依赖，所以同一套关卡生成逻辑被两个后端使用，也被 134 个单测覆盖。</a:t>
+              <a:t>不含任何渲染依赖，所以同一套关卡生成逻辑被两个后端使用，也被 138 个单测覆盖。</a:t>
             </a:r>
           </a:p>
         </p:txBody>
@@ -9670,7 +9670,7 @@
                 </a:solidFill>
                 <a:latin typeface="Segoe UI"/>
               </a:rPr>
-              <a:t>npm run verify  =  类型检查 → 单测 → 构建 → 验收，共 258 项断言，全部通过</a:t>
+              <a:t>npm run verify  =  类型检查 → 单测 → 构建 → 验收，共 268 项断言，全部通过</a:t>
             </a:r>
           </a:p>
         </p:txBody>
@@ -9755,7 +9755,7 @@
                 </a:solidFill>
                 <a:latin typeface="Segoe UI"/>
               </a:rPr>
-              <a:t>134</a:t>
+              <a:t>138</a:t>
             </a:r>
           </a:p>
         </p:txBody>
@@ -10127,7 +10127,7 @@
                 </a:solidFill>
                 <a:latin typeface="Segoe UI"/>
               </a:rPr>
-              <a:t>5</a:t>
+              <a:t>62</a:t>
             </a:r>
           </a:p>
         </p:txBody>
@@ -10166,7 +10166,7 @@
                 </a:solidFill>
                 <a:latin typeface="Segoe UI"/>
               </a:rPr>
-              <a:t>splat</a:t>
+              <a:t>真实房间</a:t>
             </a:r>
           </a:p>
         </p:txBody>
@@ -10251,7 +10251,7 @@
                 </a:solidFill>
                 <a:latin typeface="Segoe UI"/>
               </a:rPr>
-              <a:t>52</a:t>
+              <a:t>15</a:t>
             </a:r>
           </a:p>
         </p:txBody>
@@ -10290,7 +10290,7 @@
                 </a:solidFill>
                 <a:latin typeface="Segoe UI"/>
               </a:rPr>
-              <a:t>真实房间</a:t>
+              <a:t>程序化</a:t>
             </a:r>
           </a:p>
         </p:txBody>
@@ -10375,7 +10375,7 @@
                 </a:solidFill>
                 <a:latin typeface="Segoe UI"/>
               </a:rPr>
-              <a:t>15</a:t>
+              <a:t>8</a:t>
             </a:r>
           </a:p>
         </p:txBody>
@@ -10414,7 +10414,7 @@
                 </a:solidFill>
                 <a:latin typeface="Segoe UI"/>
               </a:rPr>
-              <a:t>程序化</a:t>
+              <a:t>可通关性</a:t>
             </a:r>
           </a:p>
         </p:txBody>
@@ -10551,7 +10551,7 @@
         </p:nvSpPr>
         <p:spPr>
           <a:xfrm>
-            <a:off x="658368" y="3456432"/>
+            <a:off x="658368" y="3401568"/>
             <a:ext cx="6675120" cy="658368"/>
           </a:xfrm>
           <a:prstGeom prst="roundRect">
@@ -10597,7 +10597,7 @@
         </p:nvSpPr>
         <p:spPr>
           <a:xfrm>
-            <a:off x="859536" y="3529584"/>
+            <a:off x="859536" y="3474720"/>
             <a:ext cx="6309360" cy="548640"/>
           </a:xfrm>
           <a:prstGeom prst="rect">
@@ -10652,7 +10652,7 @@
         </p:nvSpPr>
         <p:spPr>
           <a:xfrm>
-            <a:off x="658368" y="4224528"/>
+            <a:off x="658368" y="4133088"/>
             <a:ext cx="6675120" cy="658368"/>
           </a:xfrm>
           <a:prstGeom prst="roundRect">
@@ -10698,7 +10698,7 @@
         </p:nvSpPr>
         <p:spPr>
           <a:xfrm>
-            <a:off x="859536" y="4297680"/>
+            <a:off x="859536" y="4206240"/>
             <a:ext cx="6309360" cy="548640"/>
           </a:xfrm>
           <a:prstGeom prst="rect">
@@ -10753,7 +10753,7 @@
         </p:nvSpPr>
         <p:spPr>
           <a:xfrm>
-            <a:off x="658368" y="4992624"/>
+            <a:off x="658368" y="4864608"/>
             <a:ext cx="6675120" cy="658368"/>
           </a:xfrm>
           <a:prstGeom prst="roundRect">
@@ -10799,7 +10799,7 @@
         </p:nvSpPr>
         <p:spPr>
           <a:xfrm>
-            <a:off x="859536" y="5065776"/>
+            <a:off x="859536" y="4937760"/>
             <a:ext cx="6309360" cy="548640"/>
           </a:xfrm>
           <a:prstGeom prst="rect">
@@ -10849,6 +10849,107 @@
       <p:sp>
         <p:nvSpPr>
           <p:cNvPr id="35" name="Rounded Rectangle 34"/>
+          <p:cNvSpPr/>
+          <p:nvPr/>
+        </p:nvSpPr>
+        <p:spPr>
+          <a:xfrm>
+            <a:off x="658368" y="5596128"/>
+            <a:ext cx="6675120" cy="658368"/>
+          </a:xfrm>
+          <a:prstGeom prst="roundRect">
+            <a:avLst/>
+          </a:prstGeom>
+          <a:solidFill>
+            <a:srgbClr val="161518"/>
+          </a:solidFill>
+          <a:ln>
+            <a:solidFill>
+              <a:srgbClr val="2C2A2E"/>
+            </a:solidFill>
+          </a:ln>
+          <a:effectLst/>
+        </p:spPr>
+        <p:style>
+          <a:lnRef idx="1">
+            <a:schemeClr val="accent1"/>
+          </a:lnRef>
+          <a:fillRef idx="3">
+            <a:schemeClr val="accent1"/>
+          </a:fillRef>
+          <a:effectRef idx="2">
+            <a:schemeClr val="accent1"/>
+          </a:effectRef>
+          <a:fontRef idx="minor">
+            <a:schemeClr val="lt1"/>
+          </a:fontRef>
+        </p:style>
+        <p:txBody>
+          <a:bodyPr rtlCol="0" anchor="ctr"/>
+          <a:lstStyle/>
+          <a:p>
+            <a:pPr algn="ctr"/>
+          </a:p>
+        </p:txBody>
+      </p:sp>
+      <p:sp>
+        <p:nvSpPr>
+          <p:cNvPr id="36" name="TextBox 35"/>
+          <p:cNvSpPr txBox="1"/>
+          <p:nvPr/>
+        </p:nvSpPr>
+        <p:spPr>
+          <a:xfrm>
+            <a:off x="859536" y="5669280"/>
+            <a:ext cx="6309360" cy="548640"/>
+          </a:xfrm>
+          <a:prstGeom prst="rect">
+            <a:avLst/>
+          </a:prstGeom>
+          <a:noFill/>
+        </p:spPr>
+        <p:txBody>
+          <a:bodyPr wrap="square">
+            <a:spAutoFit/>
+          </a:bodyPr>
+          <a:lstStyle/>
+          <a:p>
+            <a:pPr algn="l">
+              <a:spcAft>
+                <a:spcPts val="200"/>
+              </a:spcAft>
+            </a:pPr>
+            <a:r>
+              <a:rPr sz="1200" b="1">
+                <a:solidFill>
+                  <a:srgbClr val="E8E4DC"/>
+                </a:solidFill>
+                <a:latin typeface="Segoe UI"/>
+              </a:rPr>
+              <a:t>降级必须降在瓶颈上</a:t>
+            </a:r>
+          </a:p>
+          <a:p>
+            <a:pPr algn="l">
+              <a:spcAft>
+                <a:spcPts val="0"/>
+              </a:spcAft>
+            </a:pPr>
+            <a:r>
+              <a:rPr sz="1000" b="0">
+                <a:solidFill>
+                  <a:srgbClr val="9A9488"/>
+                </a:solidFill>
+                <a:latin typeface="Segoe UI"/>
+              </a:rPr>
+              <a:t>自适应画质本来只降分辨率。实测 640×360 并不比 960×540 快 —— 时间在 CPU 排序上，不在填像素上。于是两个维度一起降，画面不再白糊。</a:t>
+            </a:r>
+          </a:p>
+        </p:txBody>
+      </p:sp>
+      <p:sp>
+        <p:nvSpPr>
+          <p:cNvPr id="37" name="Rounded Rectangle 36"/>
           <p:cNvSpPr/>
           <p:nvPr/>
         </p:nvSpPr>
@@ -10894,7 +10995,7 @@
       </p:sp>
       <p:sp>
         <p:nvSpPr>
-          <p:cNvPr id="36" name="TextBox 35"/>
+          <p:cNvPr id="38" name="TextBox 37"/>
           <p:cNvSpPr txBox="1"/>
           <p:nvPr/>
         </p:nvSpPr>

--- a/artifacts/report/FOREIGN-report.pptx
+++ b/artifacts/report/FOREIGN-report.pptx
@@ -6394,7 +6394,7 @@
                 </a:solidFill>
                 <a:latin typeface="Segoe UI"/>
               </a:rPr>
-              <a:t>现有 6 种异常</a:t>
+              <a:t>现有 7 种异常</a:t>
             </a:r>
           </a:p>
         </p:txBody>
@@ -7886,7 +7886,7 @@
                 </a:solidFill>
                 <a:latin typeface="Segoe UI"/>
               </a:rPr>
-              <a:t>63 MB 室内高斯泼溅场景，运行时流式加载。</a:t>
+              <a:t>63,022,215 字节的室内高斯泼溅场景，运行时流式加载。</a:t>
             </a:r>
           </a:p>
         </p:txBody>
@@ -8049,7 +8049,7 @@
                 </a:solidFill>
                 <a:latin typeface="Segoe UI"/>
               </a:rPr>
-              <a:t>304 KB，八叉树 + 叶位。地板、墙体、天花板都是它。</a:t>
+              <a:t>304,628 字节，八叉树 + 叶位。地板、墙体、天花板都是它。</a:t>
             </a:r>
           </a:p>
         </p:txBody>
@@ -9670,7 +9670,7 @@
                 </a:solidFill>
                 <a:latin typeface="Segoe UI"/>
               </a:rPr>
-              <a:t>npm run verify  =  类型检查 → 单测 → 构建 → 验收，共 268 项断言，全部通过</a:t>
+              <a:t>npm run verify  =  类型检查 → 单测 → 构建 → 验收，共 276 项断言，全部通过</a:t>
             </a:r>
           </a:p>
         </p:txBody>

--- a/artifacts/report/FOREIGN-report.pptx
+++ b/artifacts/report/FOREIGN-report.pptx
@@ -8577,7 +8577,7 @@
                 </a:solidFill>
                 <a:latin typeface="Segoe UI"/>
               </a:rPr>
-              <a:t>不含任何渲染依赖，所以同一套关卡生成逻辑被两个后端使用，也被 138 个单测覆盖。</a:t>
+              <a:t>不含任何渲染依赖，所以同一套关卡生成逻辑被两个后端使用，也被 134 个单测覆盖。</a:t>
             </a:r>
           </a:p>
         </p:txBody>
@@ -9670,7 +9670,7 @@
                 </a:solidFill>
                 <a:latin typeface="Segoe UI"/>
               </a:rPr>
-              <a:t>npm run verify  =  类型检查 → 单测 → 构建 → 验收，共 276 项断言，全部通过</a:t>
+              <a:t>npm run verify  =  类型检查 → 单测 → 构建 → 验收，共 253 项断言，全部通过</a:t>
             </a:r>
           </a:p>
         </p:txBody>
@@ -9755,7 +9755,7 @@
                 </a:solidFill>
                 <a:latin typeface="Segoe UI"/>
               </a:rPr>
-              <a:t>138</a:t>
+              <a:t>134</a:t>
             </a:r>
           </a:p>
         </p:txBody>
@@ -10926,7 +10926,7 @@
                 </a:solidFill>
                 <a:latin typeface="Segoe UI"/>
               </a:rPr>
-              <a:t>降级必须降在瓶颈上</a:t>
+              <a:t>性能假设也要被证伪</a:t>
             </a:r>
           </a:p>
           <a:p>
@@ -10942,7 +10942,7 @@
                 </a:solidFill>
                 <a:latin typeface="Segoe UI"/>
               </a:rPr>
-              <a:t>自适应画质本来只降分辨率。实测 640×360 并不比 960×540 快 —— 时间在 CPU 排序上，不在填像素上。于是两个维度一起降，画面不再白糊。</a:t>
+              <a:t>先猜瓶颈在填充率（降分辨率无效），再猜在 CPU 排序（cap 排序，335 帧实测只差 2–4%，且慢机器上该上限根本不会生效）。两个假设都被自己的测量推翻，第二个已移除。</a:t>
             </a:r>
           </a:p>
         </p:txBody>

--- a/artifacts/report/FOREIGN-report.pptx
+++ b/artifacts/report/FOREIGN-report.pptx
@@ -8577,7 +8577,7 @@
                 </a:solidFill>
                 <a:latin typeface="Segoe UI"/>
               </a:rPr>
-              <a:t>不含任何渲染依赖，所以同一套关卡生成逻辑被两个后端使用，也被 134 个单测覆盖。</a:t>
+              <a:t>不含任何渲染依赖，所以同一套关卡生成逻辑被两个后端使用，也被 139 个单测覆盖。</a:t>
             </a:r>
           </a:p>
         </p:txBody>
@@ -9670,7 +9670,7 @@
                 </a:solidFill>
                 <a:latin typeface="Segoe UI"/>
               </a:rPr>
-              <a:t>npm run verify  =  类型检查 → 单测 → 构建 → 验收，共 253 项断言，全部通过</a:t>
+              <a:t>npm run verify  =  类型检查 → 单测 → 构建 → 验收，共 258 项断言，全部通过</a:t>
             </a:r>
           </a:p>
         </p:txBody>
@@ -9755,7 +9755,7 @@
                 </a:solidFill>
                 <a:latin typeface="Segoe UI"/>
               </a:rPr>
-              <a:t>134</a:t>
+              <a:t>139</a:t>
             </a:r>
           </a:p>
         </p:txBody>
@@ -10926,7 +10926,7 @@
                 </a:solidFill>
                 <a:latin typeface="Segoe UI"/>
               </a:rPr>
-              <a:t>性能假设也要被证伪</a:t>
+              <a:t>性能也要被量，包括量错再纠正</a:t>
             </a:r>
           </a:p>
           <a:p>
@@ -10942,7 +10942,7 @@
                 </a:solidFill>
                 <a:latin typeface="Segoe UI"/>
               </a:rPr>
-              <a:t>先猜瓶颈在填充率（降分辨率无效），再猜在 CPU 排序（cap 排序，335 帧实测只差 2–4%，且慢机器上该上限根本不会生效）。两个假设都被自己的测量推翻，第二个已移除。</a:t>
+              <a:t>先猜瓶颈在填充率，用只采几帧的方法「验证」为否 —— 方法不可靠。改用每档 90 秒重测：关掉重建后整帧只有 17 ms，重建占 99%，分辨率降 34%。先前的结论是错的，已纠正。</a:t>
             </a:r>
           </a:p>
         </p:txBody>

--- a/artifacts/report/FOREIGN-report.pptx
+++ b/artifacts/report/FOREIGN-report.pptx
@@ -9670,7 +9670,7 @@
                 </a:solidFill>
                 <a:latin typeface="Segoe UI"/>
               </a:rPr>
-              <a:t>npm run verify  =  类型检查 → 单测 → 构建 → 验收，共 258 项断言，全部通过</a:t>
+              <a:t>npm run verify  =  类型检查 → 单测 → 构建 → 验收，共 261 项断言，全部通过</a:t>
             </a:r>
           </a:p>
         </p:txBody>
@@ -10127,7 +10127,7 @@
                 </a:solidFill>
                 <a:latin typeface="Segoe UI"/>
               </a:rPr>
-              <a:t>62</a:t>
+              <a:t>65</a:t>
             </a:r>
           </a:p>
         </p:txBody>

--- a/artifacts/report/FOREIGN-report.pptx
+++ b/artifacts/report/FOREIGN-report.pptx
@@ -3674,8 +3674,8 @@
         </p:nvSpPr>
         <p:spPr>
           <a:xfrm>
-            <a:off x="4956048" y="1965960"/>
-            <a:ext cx="1097280" cy="292608"/>
+            <a:off x="4956048" y="1938528"/>
+            <a:ext cx="1097280" cy="347472"/>
           </a:xfrm>
           <a:prstGeom prst="rect">
             <a:avLst/>
@@ -3694,7 +3694,7 @@
               </a:spcAft>
             </a:pPr>
             <a:r>
-              <a:rPr sz="1200" b="1">
+              <a:rPr sz="1100" b="1">
                 <a:solidFill>
                   <a:srgbClr val="6FA86B"/>
                 </a:solidFill>
@@ -3713,8 +3713,8 @@
         </p:nvSpPr>
         <p:spPr>
           <a:xfrm>
-            <a:off x="6144768" y="1965960"/>
-            <a:ext cx="5114239" cy="329184"/>
+            <a:off x="6144768" y="1920240"/>
+            <a:ext cx="5114239" cy="402336"/>
           </a:xfrm>
           <a:prstGeom prst="rect">
             <a:avLst/>
@@ -3733,7 +3733,7 @@
               </a:spcAft>
             </a:pPr>
             <a:r>
-              <a:rPr sz="1100" b="0">
+              <a:rPr sz="950" b="0">
                 <a:solidFill>
                   <a:srgbClr val="9A9488"/>
                 </a:solidFill>
@@ -3837,8 +3837,8 @@
         </p:nvSpPr>
         <p:spPr>
           <a:xfrm>
-            <a:off x="4956048" y="2574036"/>
-            <a:ext cx="1097280" cy="292608"/>
+            <a:off x="4956048" y="2546604"/>
+            <a:ext cx="1097280" cy="347472"/>
           </a:xfrm>
           <a:prstGeom prst="rect">
             <a:avLst/>
@@ -3857,7 +3857,7 @@
               </a:spcAft>
             </a:pPr>
             <a:r>
-              <a:rPr sz="1200" b="1">
+              <a:rPr sz="1100" b="1">
                 <a:solidFill>
                   <a:srgbClr val="6FA86B"/>
                 </a:solidFill>
@@ -3876,8 +3876,8 @@
         </p:nvSpPr>
         <p:spPr>
           <a:xfrm>
-            <a:off x="6144768" y="2574036"/>
-            <a:ext cx="5114239" cy="329184"/>
+            <a:off x="6144768" y="2528316"/>
+            <a:ext cx="5114239" cy="402336"/>
           </a:xfrm>
           <a:prstGeom prst="rect">
             <a:avLst/>
@@ -3896,13 +3896,13 @@
               </a:spcAft>
             </a:pPr>
             <a:r>
-              <a:rPr sz="1100" b="0">
+              <a:rPr sz="950" b="0">
                 <a:solidFill>
                   <a:srgbClr val="9A9488"/>
                 </a:solidFill>
                 <a:latin typeface="Segoe UI"/>
               </a:rPr>
-              <a:t>异常类型 5 → 7 种；四种惊吓而非一种；黑暗与手电筒逐层递进。</a:t>
+              <a:t>异常类型 5 → 7 种；四种惊吓；冲锋；脚步与逐层加深的音乐床。</a:t>
             </a:r>
           </a:p>
         </p:txBody>
@@ -4000,8 +4000,8 @@
         </p:nvSpPr>
         <p:spPr>
           <a:xfrm>
-            <a:off x="4956048" y="3182112"/>
-            <a:ext cx="1097280" cy="292608"/>
+            <a:off x="4956048" y="3154680"/>
+            <a:ext cx="1097280" cy="347472"/>
           </a:xfrm>
           <a:prstGeom prst="rect">
             <a:avLst/>
@@ -4020,7 +4020,7 @@
               </a:spcAft>
             </a:pPr>
             <a:r>
-              <a:rPr sz="1200" b="1">
+              <a:rPr sz="1100" b="1">
                 <a:solidFill>
                   <a:srgbClr val="6FA86B"/>
                 </a:solidFill>
@@ -4039,8 +4039,8 @@
         </p:nvSpPr>
         <p:spPr>
           <a:xfrm>
-            <a:off x="6144768" y="3182112"/>
-            <a:ext cx="5114239" cy="329184"/>
+            <a:off x="6144768" y="3136392"/>
+            <a:ext cx="5114239" cy="402336"/>
           </a:xfrm>
           <a:prstGeom prst="rect">
             <a:avLst/>
@@ -4059,7 +4059,7 @@
               </a:spcAft>
             </a:pPr>
             <a:r>
-              <a:rPr sz="1100" b="0">
+              <a:rPr sz="950" b="0">
                 <a:solidFill>
                   <a:srgbClr val="9A9488"/>
                 </a:solidFill>
@@ -4163,8 +4163,8 @@
         </p:nvSpPr>
         <p:spPr>
           <a:xfrm>
-            <a:off x="4956048" y="3790188"/>
-            <a:ext cx="1097280" cy="292608"/>
+            <a:off x="4956048" y="3762756"/>
+            <a:ext cx="1097280" cy="347472"/>
           </a:xfrm>
           <a:prstGeom prst="rect">
             <a:avLst/>
@@ -4183,13 +4183,13 @@
               </a:spcAft>
             </a:pPr>
             <a:r>
-              <a:rPr sz="1200" b="1">
-                <a:solidFill>
-                  <a:srgbClr val="6FA86B"/>
-                </a:solidFill>
-                <a:latin typeface="Segoe UI"/>
-              </a:rPr>
-              <a:t>完成</a:t>
+              <a:rPr sz="1100" b="1">
+                <a:solidFill>
+                  <a:srgbClr val="D8A64A"/>
+                </a:solidFill>
+                <a:latin typeface="Segoe UI"/>
+              </a:rPr>
+              <a:t>未上线</a:t>
             </a:r>
           </a:p>
         </p:txBody>
@@ -4202,8 +4202,8 @@
         </p:nvSpPr>
         <p:spPr>
           <a:xfrm>
-            <a:off x="6144768" y="3790188"/>
-            <a:ext cx="5114239" cy="329184"/>
+            <a:off x="6144768" y="3744468"/>
+            <a:ext cx="5114239" cy="402336"/>
           </a:xfrm>
           <a:prstGeom prst="rect">
             <a:avLst/>
@@ -4222,13 +4222,13 @@
               </a:spcAft>
             </a:pPr>
             <a:r>
-              <a:rPr sz="1100" b="0">
+              <a:rPr sz="950" b="0">
                 <a:solidFill>
                   <a:srgbClr val="9A9488"/>
                 </a:solidFill>
                 <a:latin typeface="Segoe UI"/>
               </a:rPr>
-              <a:t>cyn-nya.github.io/foreign/ —— 线上实测 8/8，34 个资产全部就位。</a:t>
+              <a:t>gh-pages 已部署、本地验收 7/7；但仓库私有，Pages 开不了，线上仍 404。需把仓库改为 public。</a:t>
             </a:r>
           </a:p>
         </p:txBody>
@@ -4326,8 +4326,8 @@
         </p:nvSpPr>
         <p:spPr>
           <a:xfrm>
-            <a:off x="4956048" y="4398264"/>
-            <a:ext cx="1097280" cy="292608"/>
+            <a:off x="4956048" y="4370832"/>
+            <a:ext cx="1097280" cy="347472"/>
           </a:xfrm>
           <a:prstGeom prst="rect">
             <a:avLst/>
@@ -4346,7 +4346,7 @@
               </a:spcAft>
             </a:pPr>
             <a:r>
-              <a:rPr sz="1200" b="1">
+              <a:rPr sz="1100" b="1">
                 <a:solidFill>
                   <a:srgbClr val="6FA86B"/>
                 </a:solidFill>
@@ -4365,8 +4365,8 @@
         </p:nvSpPr>
         <p:spPr>
           <a:xfrm>
-            <a:off x="6144768" y="4398264"/>
-            <a:ext cx="5114239" cy="329184"/>
+            <a:off x="6144768" y="4352544"/>
+            <a:ext cx="5114239" cy="402336"/>
           </a:xfrm>
           <a:prstGeom prst="rect">
             <a:avLst/>
@@ -4385,7 +4385,7 @@
               </a:spcAft>
             </a:pPr>
             <a:r>
-              <a:rPr sz="1100" b="0">
+              <a:rPr sz="950" b="0">
                 <a:solidFill>
                   <a:srgbClr val="9A9488"/>
                 </a:solidFill>
@@ -4489,8 +4489,8 @@
         </p:nvSpPr>
         <p:spPr>
           <a:xfrm>
-            <a:off x="4956048" y="5006340"/>
-            <a:ext cx="1097280" cy="292608"/>
+            <a:off x="4956048" y="4978908"/>
+            <a:ext cx="1097280" cy="347472"/>
           </a:xfrm>
           <a:prstGeom prst="rect">
             <a:avLst/>
@@ -4509,13 +4509,13 @@
               </a:spcAft>
             </a:pPr>
             <a:r>
-              <a:rPr sz="1200" b="1">
-                <a:solidFill>
-                  <a:srgbClr val="C23B2E"/>
-                </a:solidFill>
-                <a:latin typeface="Segoe UI"/>
-              </a:rPr>
-              <a:t>待生成</a:t>
+              <a:rPr sz="1100" b="1">
+                <a:solidFill>
+                  <a:srgbClr val="6FA86B"/>
+                </a:solidFill>
+                <a:latin typeface="Segoe UI"/>
+              </a:rPr>
+              <a:t>已完成</a:t>
             </a:r>
           </a:p>
         </p:txBody>
@@ -4528,8 +4528,8 @@
         </p:nvSpPr>
         <p:spPr>
           <a:xfrm>
-            <a:off x="6144768" y="5006340"/>
-            <a:ext cx="5114239" cy="329184"/>
+            <a:off x="6144768" y="4960620"/>
+            <a:ext cx="5114239" cy="402336"/>
           </a:xfrm>
           <a:prstGeom prst="rect">
             <a:avLst/>
@@ -4548,13 +4548,13 @@
               </a:spcAft>
             </a:pPr>
             <a:r>
-              <a:rPr sz="1100" b="0">
+              <a:rPr sz="950" b="0">
                 <a:solidFill>
                   <a:srgbClr val="9A9488"/>
                 </a:solidFill>
                 <a:latin typeface="Segoe UI"/>
               </a:rPr>
-              <a:t>14/21 已由 Lux3D 生成，7 个仍是占位；接入已就绪，只缺额度。</a:t>
+              <a:t>55/55 全部由 Lux3D 生成：21 个异物、鬼影、伪人与冲刺体，13 件写实家具。</a:t>
             </a:r>
           </a:p>
         </p:txBody>
@@ -4652,8 +4652,8 @@
         </p:nvSpPr>
         <p:spPr>
           <a:xfrm>
-            <a:off x="4956048" y="5614416"/>
-            <a:ext cx="1097280" cy="292608"/>
+            <a:off x="4956048" y="5586984"/>
+            <a:ext cx="1097280" cy="347472"/>
           </a:xfrm>
           <a:prstGeom prst="rect">
             <a:avLst/>
@@ -4672,7 +4672,7 @@
               </a:spcAft>
             </a:pPr>
             <a:r>
-              <a:rPr sz="1200" b="1">
+              <a:rPr sz="1100" b="1">
                 <a:solidFill>
                   <a:srgbClr val="C23B2E"/>
                 </a:solidFill>
@@ -4691,8 +4691,8 @@
         </p:nvSpPr>
         <p:spPr>
           <a:xfrm>
-            <a:off x="6144768" y="5614416"/>
-            <a:ext cx="5114239" cy="329184"/>
+            <a:off x="6144768" y="5568696"/>
+            <a:ext cx="5114239" cy="402336"/>
           </a:xfrm>
           <a:prstGeom prst="rect">
             <a:avLst/>
@@ -4711,7 +4711,7 @@
               </a:spcAft>
             </a:pPr>
             <a:r>
-              <a:rPr sz="1100" b="0">
+              <a:rPr sz="950" b="0">
                 <a:solidFill>
                   <a:srgbClr val="9A9488"/>
                 </a:solidFill>
@@ -8577,7 +8577,7 @@
                 </a:solidFill>
                 <a:latin typeface="Segoe UI"/>
               </a:rPr>
-              <a:t>不含任何渲染依赖，所以同一套关卡生成逻辑被两个后端使用，也被 139 个单测覆盖。</a:t>
+              <a:t>不含任何渲染依赖，所以同一套关卡生成逻辑被两个后端使用，也被 168 个单测覆盖。</a:t>
             </a:r>
           </a:p>
         </p:txBody>
@@ -9670,7 +9670,7 @@
                 </a:solidFill>
                 <a:latin typeface="Segoe UI"/>
               </a:rPr>
-              <a:t>npm run verify  =  类型检查 → 单测 → 构建 → 验收，共 261 项断言，全部通过</a:t>
+              <a:t>npm run verify  =  类型检查 → 单测 → 构建 → 验收，共 306 项断言，全部通过</a:t>
             </a:r>
           </a:p>
         </p:txBody>
@@ -9755,7 +9755,7 @@
                 </a:solidFill>
                 <a:latin typeface="Segoe UI"/>
               </a:rPr>
-              <a:t>139</a:t>
+              <a:t>168</a:t>
             </a:r>
           </a:p>
         </p:txBody>
@@ -10127,7 +10127,7 @@
                 </a:solidFill>
                 <a:latin typeface="Segoe UI"/>
               </a:rPr>
-              <a:t>65</a:t>
+              <a:t>81</a:t>
             </a:r>
           </a:p>
         </p:txBody>
@@ -10926,7 +10926,7 @@
                 </a:solidFill>
                 <a:latin typeface="Segoe UI"/>
               </a:rPr>
-              <a:t>性能也要被量，包括量错再纠正</a:t>
+              <a:t>性能也要被量，而且量错了两次</a:t>
             </a:r>
           </a:p>
           <a:p>
@@ -10942,7 +10942,7 @@
                 </a:solidFill>
                 <a:latin typeface="Segoe UI"/>
               </a:rPr>
-              <a:t>先猜瓶颈在填充率，用只采几帧的方法「验证」为否 —— 方法不可靠。改用每档 90 秒重测：关掉重建后整帧只有 17 ms，重建占 99%，分辨率降 34%。先前的结论是错的，已纠正。</a:t>
+              <a:t>先猜瓶颈在 CPU 排序 —— 方法不可靠。改用每档 90 秒重测：重建占 99%，分辨率 0.40x 省 29%。但同一套方法又报了四个「有效旋钮」，重跑全部落空（基线自己漂了 60%）；工具这次拒绝出结论，四个都没进代码。</a:t>
             </a:r>
           </a:p>
         </p:txBody>
@@ -11312,7 +11312,7 @@
         <p:spPr>
           <a:xfrm>
             <a:off x="658368" y="1792224"/>
-            <a:ext cx="6400800" cy="969264"/>
+            <a:ext cx="6400800" cy="676656"/>
           </a:xfrm>
           <a:prstGeom prst="roundRect">
             <a:avLst/>
@@ -11357,8 +11357,8 @@
         </p:nvSpPr>
         <p:spPr>
           <a:xfrm>
-            <a:off x="877824" y="1883664"/>
-            <a:ext cx="5943600" cy="822960"/>
+            <a:off x="877824" y="1847088"/>
+            <a:ext cx="5943600" cy="585216"/>
           </a:xfrm>
           <a:prstGeom prst="rect">
             <a:avLst/>
@@ -11377,7 +11377,7 @@
               </a:spcAft>
             </a:pPr>
             <a:r>
-              <a:rPr sz="1500" b="1">
+              <a:rPr sz="1300" b="1">
                 <a:solidFill>
                   <a:srgbClr val="E8E4DC"/>
                 </a:solidFill>
@@ -11393,7 +11393,7 @@
               </a:spcAft>
             </a:pPr>
             <a:r>
-              <a:rPr sz="1100" b="0">
+              <a:rPr sz="950" b="0">
                 <a:solidFill>
                   <a:srgbClr val="9A9488"/>
                 </a:solidFill>
@@ -11413,8 +11413,8 @@
         </p:nvSpPr>
         <p:spPr>
           <a:xfrm>
-            <a:off x="658368" y="2852928"/>
-            <a:ext cx="6400800" cy="969264"/>
+            <a:off x="658368" y="2523744"/>
+            <a:ext cx="6400800" cy="676656"/>
           </a:xfrm>
           <a:prstGeom prst="roundRect">
             <a:avLst/>
@@ -11459,8 +11459,8 @@
         </p:nvSpPr>
         <p:spPr>
           <a:xfrm>
-            <a:off x="877824" y="2944368"/>
-            <a:ext cx="5943600" cy="822960"/>
+            <a:off x="877824" y="2578608"/>
+            <a:ext cx="5943600" cy="585216"/>
           </a:xfrm>
           <a:prstGeom prst="rect">
             <a:avLst/>
@@ -11479,7 +11479,7 @@
               </a:spcAft>
             </a:pPr>
             <a:r>
-              <a:rPr sz="1500" b="1">
+              <a:rPr sz="1300" b="1">
                 <a:solidFill>
                   <a:srgbClr val="E8E4DC"/>
                 </a:solidFill>
@@ -11495,7 +11495,7 @@
               </a:spcAft>
             </a:pPr>
             <a:r>
-              <a:rPr sz="1100" b="0">
+              <a:rPr sz="950" b="0">
                 <a:solidFill>
                   <a:srgbClr val="9A9488"/>
                 </a:solidFill>
@@ -11515,8 +11515,8 @@
         </p:nvSpPr>
         <p:spPr>
           <a:xfrm>
-            <a:off x="658368" y="3913632"/>
-            <a:ext cx="6400800" cy="969264"/>
+            <a:off x="658368" y="3255264"/>
+            <a:ext cx="6400800" cy="676656"/>
           </a:xfrm>
           <a:prstGeom prst="roundRect">
             <a:avLst/>
@@ -11561,8 +11561,8 @@
         </p:nvSpPr>
         <p:spPr>
           <a:xfrm>
-            <a:off x="877824" y="4005072"/>
-            <a:ext cx="5943600" cy="822960"/>
+            <a:off x="877824" y="3310128"/>
+            <a:ext cx="5943600" cy="585216"/>
           </a:xfrm>
           <a:prstGeom prst="rect">
             <a:avLst/>
@@ -11581,7 +11581,7 @@
               </a:spcAft>
             </a:pPr>
             <a:r>
-              <a:rPr sz="1500" b="1">
+              <a:rPr sz="1300" b="1">
                 <a:solidFill>
                   <a:srgbClr val="E8E4DC"/>
                 </a:solidFill>
@@ -11597,7 +11597,7 @@
               </a:spcAft>
             </a:pPr>
             <a:r>
-              <a:rPr sz="1100" b="0">
+              <a:rPr sz="950" b="0">
                 <a:solidFill>
                   <a:srgbClr val="9A9488"/>
                 </a:solidFill>
@@ -11617,8 +11617,8 @@
         </p:nvSpPr>
         <p:spPr>
           <a:xfrm>
-            <a:off x="658368" y="5102352"/>
-            <a:ext cx="6400800" cy="868680"/>
+            <a:off x="658368" y="3986784"/>
+            <a:ext cx="6400800" cy="676656"/>
           </a:xfrm>
           <a:prstGeom prst="roundRect">
             <a:avLst/>
@@ -11663,8 +11663,8 @@
         </p:nvSpPr>
         <p:spPr>
           <a:xfrm>
-            <a:off x="877824" y="5212080"/>
-            <a:ext cx="5943600" cy="658368"/>
+            <a:off x="877824" y="4041648"/>
+            <a:ext cx="5943600" cy="585216"/>
           </a:xfrm>
           <a:prstGeom prst="rect">
             <a:avLst/>
@@ -11683,6 +11683,210 @@
               </a:spcAft>
             </a:pPr>
             <a:r>
+              <a:rPr sz="1300" b="1">
+                <a:solidFill>
+                  <a:srgbClr val="E8E4DC"/>
+                </a:solidFill>
+                <a:latin typeface="Segoe UI"/>
+              </a:rPr>
+              <a:t>它会自己冲过来</a:t>
+            </a:r>
+          </a:p>
+          <a:p>
+            <a:pPr algn="l">
+              <a:spcAft>
+                <a:spcPts val="0"/>
+              </a:spcAft>
+            </a:pPr>
+            <a:r>
+              <a:rPr sz="950" b="0">
+                <a:solidFill>
+                  <a:srgbClr val="9A9488"/>
+                </a:solidFill>
+                <a:latin typeface="Segoe UI"/>
+              </a:rPr>
+              <a:t>第 3 层起，一个真实模型穿过房间向你逼近，窗口按层收紧（2200 ms → 1000 ms）。
+点鼠标解除；没解除就撞上你，并触发一次扑脸。这是唯一一个必须动手的机制。</a:t>
+            </a:r>
+          </a:p>
+        </p:txBody>
+      </p:sp>
+      <p:sp>
+        <p:nvSpPr>
+          <p:cNvPr id="15" name="Rounded Rectangle 14"/>
+          <p:cNvSpPr/>
+          <p:nvPr/>
+        </p:nvSpPr>
+        <p:spPr>
+          <a:xfrm>
+            <a:off x="658368" y="4718304"/>
+            <a:ext cx="6400800" cy="676656"/>
+          </a:xfrm>
+          <a:prstGeom prst="roundRect">
+            <a:avLst/>
+          </a:prstGeom>
+          <a:solidFill>
+            <a:srgbClr val="161518"/>
+          </a:solidFill>
+          <a:ln>
+            <a:solidFill>
+              <a:srgbClr val="2C2A2E"/>
+            </a:solidFill>
+          </a:ln>
+          <a:effectLst/>
+        </p:spPr>
+        <p:style>
+          <a:lnRef idx="1">
+            <a:schemeClr val="accent1"/>
+          </a:lnRef>
+          <a:fillRef idx="3">
+            <a:schemeClr val="accent1"/>
+          </a:fillRef>
+          <a:effectRef idx="2">
+            <a:schemeClr val="accent1"/>
+          </a:effectRef>
+          <a:fontRef idx="minor">
+            <a:schemeClr val="lt1"/>
+          </a:fontRef>
+        </p:style>
+        <p:txBody>
+          <a:bodyPr rtlCol="0" anchor="ctr"/>
+          <a:lstStyle/>
+          <a:p>
+            <a:pPr algn="ctr"/>
+          </a:p>
+        </p:txBody>
+      </p:sp>
+      <p:sp>
+        <p:nvSpPr>
+          <p:cNvPr id="16" name="TextBox 15"/>
+          <p:cNvSpPr txBox="1"/>
+          <p:nvPr/>
+        </p:nvSpPr>
+        <p:spPr>
+          <a:xfrm>
+            <a:off x="877824" y="4773168"/>
+            <a:ext cx="5943600" cy="585216"/>
+          </a:xfrm>
+          <a:prstGeom prst="rect">
+            <a:avLst/>
+          </a:prstGeom>
+          <a:noFill/>
+        </p:spPr>
+        <p:txBody>
+          <a:bodyPr wrap="square">
+            <a:spAutoFit/>
+          </a:bodyPr>
+          <a:lstStyle/>
+          <a:p>
+            <a:pPr algn="l">
+              <a:spcAft>
+                <a:spcPts val="300"/>
+              </a:spcAft>
+            </a:pPr>
+            <a:r>
+              <a:rPr sz="1300" b="1">
+                <a:solidFill>
+                  <a:srgbClr val="E8E4DC"/>
+                </a:solidFill>
+                <a:latin typeface="Segoe UI"/>
+              </a:rPr>
+              <a:t>脚步是距离，不是定时器</a:t>
+            </a:r>
+          </a:p>
+          <a:p>
+            <a:pPr algn="l">
+              <a:spcAft>
+                <a:spcPts val="0"/>
+              </a:spcAft>
+            </a:pPr>
+            <a:r>
+              <a:rPr sz="950" b="0">
+                <a:solidFill>
+                  <a:srgbClr val="9A9488"/>
+                </a:solidFill>
+                <a:latin typeface="Segoe UI"/>
+              </a:rPr>
+              <a:t>站在原地不动时一声不响（0.78 m 一步，且两步之间有下限间隔）。
+定时器版本会在你屏住呼吸的时候一直响 —— 那是恐怖游戏最不能犯的错。</a:t>
+            </a:r>
+          </a:p>
+        </p:txBody>
+      </p:sp>
+      <p:sp>
+        <p:nvSpPr>
+          <p:cNvPr id="17" name="Rounded Rectangle 16"/>
+          <p:cNvSpPr/>
+          <p:nvPr/>
+        </p:nvSpPr>
+        <p:spPr>
+          <a:xfrm>
+            <a:off x="658368" y="5504687"/>
+            <a:ext cx="6400800" cy="786384"/>
+          </a:xfrm>
+          <a:prstGeom prst="roundRect">
+            <a:avLst/>
+          </a:prstGeom>
+          <a:solidFill>
+            <a:srgbClr val="161518"/>
+          </a:solidFill>
+          <a:ln>
+            <a:solidFill>
+              <a:srgbClr val="2C2A2E"/>
+            </a:solidFill>
+          </a:ln>
+          <a:effectLst/>
+        </p:spPr>
+        <p:style>
+          <a:lnRef idx="1">
+            <a:schemeClr val="accent1"/>
+          </a:lnRef>
+          <a:fillRef idx="3">
+            <a:schemeClr val="accent1"/>
+          </a:fillRef>
+          <a:effectRef idx="2">
+            <a:schemeClr val="accent1"/>
+          </a:effectRef>
+          <a:fontRef idx="minor">
+            <a:schemeClr val="lt1"/>
+          </a:fontRef>
+        </p:style>
+        <p:txBody>
+          <a:bodyPr rtlCol="0" anchor="ctr"/>
+          <a:lstStyle/>
+          <a:p>
+            <a:pPr algn="ctr"/>
+          </a:p>
+        </p:txBody>
+      </p:sp>
+      <p:sp>
+        <p:nvSpPr>
+          <p:cNvPr id="18" name="TextBox 17"/>
+          <p:cNvSpPr txBox="1"/>
+          <p:nvPr/>
+        </p:nvSpPr>
+        <p:spPr>
+          <a:xfrm>
+            <a:off x="877824" y="5596128"/>
+            <a:ext cx="5943600" cy="621792"/>
+          </a:xfrm>
+          <a:prstGeom prst="rect">
+            <a:avLst/>
+          </a:prstGeom>
+          <a:noFill/>
+        </p:spPr>
+        <p:txBody>
+          <a:bodyPr wrap="square">
+            <a:spAutoFit/>
+          </a:bodyPr>
+          <a:lstStyle/>
+          <a:p>
+            <a:pPr algn="l">
+              <a:spcAft>
+                <a:spcPts val="300"/>
+              </a:spcAft>
+            </a:pPr>
+            <a:r>
               <a:rPr sz="1400" b="1">
                 <a:solidFill>
                   <a:srgbClr val="6FA86B"/>
@@ -11705,14 +11909,14 @@
                 </a:solidFill>
                 <a:latin typeface="Segoe UI"/>
               </a:rPr>
-              <a:t>读的是 AnalyserNode 的实际信号：7 m 处 gain 0.789、0.5 m 处 0.909，平均 RMS 近处响 21–31%。</a:t>
-            </a:r>
-          </a:p>
-        </p:txBody>
-      </p:sp>
-      <p:sp>
-        <p:nvSpPr>
-          <p:cNvPr id="15" name="Rectangle 14"/>
+              <a:t>读的是 AnalyserNode 的实际信号：7 m 处 gain 0.789、0.5 m 处 0.909，平均 RMS 近处响 21–31%。脚步则断言「走路有声、站着无声」两半。</a:t>
+            </a:r>
+          </a:p>
+        </p:txBody>
+      </p:sp>
+      <p:sp>
+        <p:nvSpPr>
+          <p:cNvPr id="19" name="Rectangle 18"/>
           <p:cNvSpPr/>
           <p:nvPr/>
         </p:nvSpPr>
@@ -11756,7 +11960,7 @@
       </p:sp>
       <p:pic>
         <p:nvPicPr>
-          <p:cNvPr id="16" name="Picture 15" descr="04-marked.png"/>
+          <p:cNvPr id="20" name="Picture 19" descr="04-marked.png"/>
           <p:cNvPicPr>
             <a:picLocks noChangeAspect="1"/>
           </p:cNvPicPr>

--- a/artifacts/report/FOREIGN-report.pptx
+++ b/artifacts/report/FOREIGN-report.pptx
@@ -4391,7 +4391,7 @@
                 </a:solidFill>
                 <a:latin typeface="Segoe UI"/>
               </a:rPr>
-              <a:t>90 秒 720p。本机每秒不足一帧，录不了实机，故用真实截图合成。</a:t>
+              <a:t>100 秒 720p、10 个真实镜头。本机每秒不足一帧，录不了实机，故用真实截图合成。</a:t>
             </a:r>
           </a:p>
         </p:txBody>

--- a/artifacts/report/FOREIGN-report.pptx
+++ b/artifacts/report/FOREIGN-report.pptx
@@ -4228,7 +4228,7 @@
                 </a:solidFill>
                 <a:latin typeface="Segoe UI"/>
               </a:rPr>
-              <a:t>gh-pages 已部署、本地验收 7/7；但仓库私有，Pages 开不了，线上仍 404。需把仓库改为 public。</a:t>
+              <a:t>gh-pages 已部署、本地验收 7/7，但 Pages 从未开启过（has_pages: false）：需先改仓库为 public，再手工开启一次 Pages。</a:t>
             </a:r>
           </a:p>
         </p:txBody>

--- a/artifacts/report/FOREIGN-report.pptx
+++ b/artifacts/report/FOREIGN-report.pptx
@@ -8577,7 +8577,7 @@
                 </a:solidFill>
                 <a:latin typeface="Segoe UI"/>
               </a:rPr>
-              <a:t>不含任何渲染依赖，所以同一套关卡生成逻辑被两个后端使用，也被 168 个单测覆盖。</a:t>
+              <a:t>不含任何渲染依赖，所以同一套关卡生成逻辑被两个后端使用，也被 172 个单测覆盖。</a:t>
             </a:r>
           </a:p>
         </p:txBody>
@@ -9670,7 +9670,7 @@
                 </a:solidFill>
                 <a:latin typeface="Segoe UI"/>
               </a:rPr>
-              <a:t>npm run verify  =  类型检查 → 单测 → 构建 → 验收，共 306 项断言，全部通过</a:t>
+              <a:t>npm run verify  =  类型检查 → 单测 → 构建 → 验收，共 311 项断言，全部通过</a:t>
             </a:r>
           </a:p>
         </p:txBody>
@@ -9755,7 +9755,7 @@
                 </a:solidFill>
                 <a:latin typeface="Segoe UI"/>
               </a:rPr>
-              <a:t>168</a:t>
+              <a:t>172</a:t>
             </a:r>
           </a:p>
         </p:txBody>
@@ -10127,7 +10127,7 @@
                 </a:solidFill>
                 <a:latin typeface="Segoe UI"/>
               </a:rPr>
-              <a:t>81</a:t>
+              <a:t>82</a:t>
             </a:r>
           </a:p>
         </p:txBody>
@@ -10551,8 +10551,8 @@
         </p:nvSpPr>
         <p:spPr>
           <a:xfrm>
-            <a:off x="658368" y="3401568"/>
-            <a:ext cx="6675120" cy="658368"/>
+            <a:off x="658368" y="2907792"/>
+            <a:ext cx="6675120" cy="640080"/>
           </a:xfrm>
           <a:prstGeom prst="roundRect">
             <a:avLst/>
@@ -10597,7 +10597,7 @@
         </p:nvSpPr>
         <p:spPr>
           <a:xfrm>
-            <a:off x="859536" y="3474720"/>
+            <a:off x="859536" y="2962656"/>
             <a:ext cx="6309360" cy="548640"/>
           </a:xfrm>
           <a:prstGeom prst="rect">
@@ -10617,7 +10617,7 @@
               </a:spcAft>
             </a:pPr>
             <a:r>
-              <a:rPr sz="1200" b="1">
+              <a:rPr sz="1150" b="1">
                 <a:solidFill>
                   <a:srgbClr val="E8E4DC"/>
                 </a:solidFill>
@@ -10633,7 +10633,7 @@
               </a:spcAft>
             </a:pPr>
             <a:r>
-              <a:rPr sz="1000" b="0">
+              <a:rPr sz="950" b="0">
                 <a:solidFill>
                   <a:srgbClr val="9A9488"/>
                 </a:solidFill>
@@ -10652,8 +10652,8 @@
         </p:nvSpPr>
         <p:spPr>
           <a:xfrm>
-            <a:off x="658368" y="4133088"/>
-            <a:ext cx="6675120" cy="658368"/>
+            <a:off x="658368" y="3602736"/>
+            <a:ext cx="6675120" cy="640080"/>
           </a:xfrm>
           <a:prstGeom prst="roundRect">
             <a:avLst/>
@@ -10698,7 +10698,7 @@
         </p:nvSpPr>
         <p:spPr>
           <a:xfrm>
-            <a:off x="859536" y="4206240"/>
+            <a:off x="859536" y="3657600"/>
             <a:ext cx="6309360" cy="548640"/>
           </a:xfrm>
           <a:prstGeom prst="rect">
@@ -10718,7 +10718,7 @@
               </a:spcAft>
             </a:pPr>
             <a:r>
-              <a:rPr sz="1200" b="1">
+              <a:rPr sz="1150" b="1">
                 <a:solidFill>
                   <a:srgbClr val="E8E4DC"/>
                 </a:solidFill>
@@ -10734,7 +10734,7 @@
               </a:spcAft>
             </a:pPr>
             <a:r>
-              <a:rPr sz="1000" b="0">
+              <a:rPr sz="950" b="0">
                 <a:solidFill>
                   <a:srgbClr val="9A9488"/>
                 </a:solidFill>
@@ -10753,8 +10753,8 @@
         </p:nvSpPr>
         <p:spPr>
           <a:xfrm>
-            <a:off x="658368" y="4864608"/>
-            <a:ext cx="6675120" cy="658368"/>
+            <a:off x="658368" y="4297680"/>
+            <a:ext cx="6675120" cy="640080"/>
           </a:xfrm>
           <a:prstGeom prst="roundRect">
             <a:avLst/>
@@ -10799,7 +10799,7 @@
         </p:nvSpPr>
         <p:spPr>
           <a:xfrm>
-            <a:off x="859536" y="4937760"/>
+            <a:off x="859536" y="4352544"/>
             <a:ext cx="6309360" cy="548640"/>
           </a:xfrm>
           <a:prstGeom prst="rect">
@@ -10819,7 +10819,7 @@
               </a:spcAft>
             </a:pPr>
             <a:r>
-              <a:rPr sz="1200" b="1">
+              <a:rPr sz="1150" b="1">
                 <a:solidFill>
                   <a:srgbClr val="E8E4DC"/>
                 </a:solidFill>
@@ -10835,7 +10835,7 @@
               </a:spcAft>
             </a:pPr>
             <a:r>
-              <a:rPr sz="1000" b="0">
+              <a:rPr sz="950" b="0">
                 <a:solidFill>
                   <a:srgbClr val="9A9488"/>
                 </a:solidFill>
@@ -10854,8 +10854,8 @@
         </p:nvSpPr>
         <p:spPr>
           <a:xfrm>
-            <a:off x="658368" y="5596128"/>
-            <a:ext cx="6675120" cy="658368"/>
+            <a:off x="658368" y="4992624"/>
+            <a:ext cx="6675120" cy="640080"/>
           </a:xfrm>
           <a:prstGeom prst="roundRect">
             <a:avLst/>
@@ -10900,7 +10900,7 @@
         </p:nvSpPr>
         <p:spPr>
           <a:xfrm>
-            <a:off x="859536" y="5669280"/>
+            <a:off x="859536" y="5047488"/>
             <a:ext cx="6309360" cy="548640"/>
           </a:xfrm>
           <a:prstGeom prst="rect">
@@ -10920,12 +10920,113 @@
               </a:spcAft>
             </a:pPr>
             <a:r>
-              <a:rPr sz="1200" b="1">
+              <a:rPr sz="1150" b="1">
                 <a:solidFill>
                   <a:srgbClr val="E8E4DC"/>
                 </a:solidFill>
                 <a:latin typeface="Segoe UI"/>
               </a:rPr>
+              <a:t>同一症状出现两次，就该去量而不是再猜</a:t>
+            </a:r>
+          </a:p>
+          <a:p>
+            <a:pPr algn="l">
+              <a:spcAft>
+                <a:spcPts val="0"/>
+              </a:spcAft>
+            </a:pPr>
+            <a:r>
+              <a:rPr sz="950" b="0">
+                <a:solidFill>
+                  <a:srgbClr val="9A9488"/>
+                </a:solidFill>
+                <a:latin typeface="Segoe UI"/>
+              </a:rPr>
+              <a:t>玩家两遍都说「第一关走完了没找到东西」。四个假设全被测量否掉，最后指向 height：渲染器当它是缩放目标所以永远对，过滤器却当它是真实尺寸。</a:t>
+            </a:r>
+          </a:p>
+        </p:txBody>
+      </p:sp>
+      <p:sp>
+        <p:nvSpPr>
+          <p:cNvPr id="37" name="Rounded Rectangle 36"/>
+          <p:cNvSpPr/>
+          <p:nvPr/>
+        </p:nvSpPr>
+        <p:spPr>
+          <a:xfrm>
+            <a:off x="658368" y="5687568"/>
+            <a:ext cx="6675120" cy="640080"/>
+          </a:xfrm>
+          <a:prstGeom prst="roundRect">
+            <a:avLst/>
+          </a:prstGeom>
+          <a:solidFill>
+            <a:srgbClr val="161518"/>
+          </a:solidFill>
+          <a:ln>
+            <a:solidFill>
+              <a:srgbClr val="2C2A2E"/>
+            </a:solidFill>
+          </a:ln>
+          <a:effectLst/>
+        </p:spPr>
+        <p:style>
+          <a:lnRef idx="1">
+            <a:schemeClr val="accent1"/>
+          </a:lnRef>
+          <a:fillRef idx="3">
+            <a:schemeClr val="accent1"/>
+          </a:fillRef>
+          <a:effectRef idx="2">
+            <a:schemeClr val="accent1"/>
+          </a:effectRef>
+          <a:fontRef idx="minor">
+            <a:schemeClr val="lt1"/>
+          </a:fontRef>
+        </p:style>
+        <p:txBody>
+          <a:bodyPr rtlCol="0" anchor="ctr"/>
+          <a:lstStyle/>
+          <a:p>
+            <a:pPr algn="ctr"/>
+          </a:p>
+        </p:txBody>
+      </p:sp>
+      <p:sp>
+        <p:nvSpPr>
+          <p:cNvPr id="38" name="TextBox 37"/>
+          <p:cNvSpPr txBox="1"/>
+          <p:nvPr/>
+        </p:nvSpPr>
+        <p:spPr>
+          <a:xfrm>
+            <a:off x="859536" y="5742432"/>
+            <a:ext cx="6309360" cy="548640"/>
+          </a:xfrm>
+          <a:prstGeom prst="rect">
+            <a:avLst/>
+          </a:prstGeom>
+          <a:noFill/>
+        </p:spPr>
+        <p:txBody>
+          <a:bodyPr wrap="square">
+            <a:spAutoFit/>
+          </a:bodyPr>
+          <a:lstStyle/>
+          <a:p>
+            <a:pPr algn="l">
+              <a:spcAft>
+                <a:spcPts val="200"/>
+              </a:spcAft>
+            </a:pPr>
+            <a:r>
+              <a:rPr sz="1150" b="1">
+                <a:solidFill>
+                  <a:srgbClr val="E8E4DC"/>
+                </a:solidFill>
+                <a:latin typeface="Segoe UI"/>
+              </a:rPr>
               <a:t>性能也要被量，而且量错了两次</a:t>
             </a:r>
           </a:p>
@@ -10936,7 +11037,7 @@
               </a:spcAft>
             </a:pPr>
             <a:r>
-              <a:rPr sz="1000" b="0">
+              <a:rPr sz="950" b="0">
                 <a:solidFill>
                   <a:srgbClr val="9A9488"/>
                 </a:solidFill>
@@ -10949,7 +11050,7 @@
       </p:sp>
       <p:sp>
         <p:nvSpPr>
-          <p:cNvPr id="37" name="Rounded Rectangle 36"/>
+          <p:cNvPr id="39" name="Rounded Rectangle 38"/>
           <p:cNvSpPr/>
           <p:nvPr/>
         </p:nvSpPr>
@@ -10995,7 +11096,7 @@
       </p:sp>
       <p:sp>
         <p:nvSpPr>
-          <p:cNvPr id="38" name="TextBox 37"/>
+          <p:cNvPr id="40" name="TextBox 39"/>
           <p:cNvSpPr txBox="1"/>
           <p:nvPr/>
         </p:nvSpPr>

--- a/artifacts/report/FOREIGN-report.pptx
+++ b/artifacts/report/FOREIGN-report.pptx
@@ -10551,8 +10551,8 @@
         </p:nvSpPr>
         <p:spPr>
           <a:xfrm>
-            <a:off x="658368" y="2907792"/>
-            <a:ext cx="6675120" cy="640080"/>
+            <a:off x="658368" y="2798064"/>
+            <a:ext cx="6675120" cy="566928"/>
           </a:xfrm>
           <a:prstGeom prst="roundRect">
             <a:avLst/>
@@ -10597,8 +10597,8 @@
         </p:nvSpPr>
         <p:spPr>
           <a:xfrm>
-            <a:off x="859536" y="2962656"/>
-            <a:ext cx="6309360" cy="548640"/>
+            <a:off x="859536" y="2834640"/>
+            <a:ext cx="6309360" cy="512064"/>
           </a:xfrm>
           <a:prstGeom prst="rect">
             <a:avLst/>
@@ -10613,11 +10613,11 @@
           <a:p>
             <a:pPr algn="l">
               <a:spcAft>
-                <a:spcPts val="200"/>
-              </a:spcAft>
-            </a:pPr>
-            <a:r>
-              <a:rPr sz="1150" b="1">
+                <a:spcPts val="100"/>
+              </a:spcAft>
+            </a:pPr>
+            <a:r>
+              <a:rPr sz="1100" b="1">
                 <a:solidFill>
                   <a:srgbClr val="E8E4DC"/>
                 </a:solidFill>
@@ -10633,7 +10633,7 @@
               </a:spcAft>
             </a:pPr>
             <a:r>
-              <a:rPr sz="950" b="0">
+              <a:rPr sz="900" b="0">
                 <a:solidFill>
                   <a:srgbClr val="9A9488"/>
                 </a:solidFill>
@@ -10652,8 +10652,8 @@
         </p:nvSpPr>
         <p:spPr>
           <a:xfrm>
-            <a:off x="658368" y="3602736"/>
-            <a:ext cx="6675120" cy="640080"/>
+            <a:off x="658368" y="3419856"/>
+            <a:ext cx="6675120" cy="566928"/>
           </a:xfrm>
           <a:prstGeom prst="roundRect">
             <a:avLst/>
@@ -10698,8 +10698,8 @@
         </p:nvSpPr>
         <p:spPr>
           <a:xfrm>
-            <a:off x="859536" y="3657600"/>
-            <a:ext cx="6309360" cy="548640"/>
+            <a:off x="859536" y="3456432"/>
+            <a:ext cx="6309360" cy="512064"/>
           </a:xfrm>
           <a:prstGeom prst="rect">
             <a:avLst/>
@@ -10714,11 +10714,11 @@
           <a:p>
             <a:pPr algn="l">
               <a:spcAft>
-                <a:spcPts val="200"/>
-              </a:spcAft>
-            </a:pPr>
-            <a:r>
-              <a:rPr sz="1150" b="1">
+                <a:spcPts val="100"/>
+              </a:spcAft>
+            </a:pPr>
+            <a:r>
+              <a:rPr sz="1100" b="1">
                 <a:solidFill>
                   <a:srgbClr val="E8E4DC"/>
                 </a:solidFill>
@@ -10734,7 +10734,7 @@
               </a:spcAft>
             </a:pPr>
             <a:r>
-              <a:rPr sz="950" b="0">
+              <a:rPr sz="900" b="0">
                 <a:solidFill>
                   <a:srgbClr val="9A9488"/>
                 </a:solidFill>
@@ -10753,8 +10753,8 @@
         </p:nvSpPr>
         <p:spPr>
           <a:xfrm>
-            <a:off x="658368" y="4297680"/>
-            <a:ext cx="6675120" cy="640080"/>
+            <a:off x="658368" y="4041648"/>
+            <a:ext cx="6675120" cy="566928"/>
           </a:xfrm>
           <a:prstGeom prst="roundRect">
             <a:avLst/>
@@ -10799,8 +10799,8 @@
         </p:nvSpPr>
         <p:spPr>
           <a:xfrm>
-            <a:off x="859536" y="4352544"/>
-            <a:ext cx="6309360" cy="548640"/>
+            <a:off x="859536" y="4078224"/>
+            <a:ext cx="6309360" cy="512064"/>
           </a:xfrm>
           <a:prstGeom prst="rect">
             <a:avLst/>
@@ -10815,11 +10815,11 @@
           <a:p>
             <a:pPr algn="l">
               <a:spcAft>
-                <a:spcPts val="200"/>
-              </a:spcAft>
-            </a:pPr>
-            <a:r>
-              <a:rPr sz="1150" b="1">
+                <a:spcPts val="100"/>
+              </a:spcAft>
+            </a:pPr>
+            <a:r>
+              <a:rPr sz="1100" b="1">
                 <a:solidFill>
                   <a:srgbClr val="E8E4DC"/>
                 </a:solidFill>
@@ -10835,7 +10835,7 @@
               </a:spcAft>
             </a:pPr>
             <a:r>
-              <a:rPr sz="950" b="0">
+              <a:rPr sz="900" b="0">
                 <a:solidFill>
                   <a:srgbClr val="9A9488"/>
                 </a:solidFill>
@@ -10854,8 +10854,8 @@
         </p:nvSpPr>
         <p:spPr>
           <a:xfrm>
-            <a:off x="658368" y="4992624"/>
-            <a:ext cx="6675120" cy="640080"/>
+            <a:off x="658368" y="4663440"/>
+            <a:ext cx="6675120" cy="566928"/>
           </a:xfrm>
           <a:prstGeom prst="roundRect">
             <a:avLst/>
@@ -10900,8 +10900,8 @@
         </p:nvSpPr>
         <p:spPr>
           <a:xfrm>
-            <a:off x="859536" y="5047488"/>
-            <a:ext cx="6309360" cy="548640"/>
+            <a:off x="859536" y="4700016"/>
+            <a:ext cx="6309360" cy="512064"/>
           </a:xfrm>
           <a:prstGeom prst="rect">
             <a:avLst/>
@@ -10916,11 +10916,11 @@
           <a:p>
             <a:pPr algn="l">
               <a:spcAft>
-                <a:spcPts val="200"/>
-              </a:spcAft>
-            </a:pPr>
-            <a:r>
-              <a:rPr sz="1150" b="1">
+                <a:spcPts val="100"/>
+              </a:spcAft>
+            </a:pPr>
+            <a:r>
+              <a:rPr sz="1100" b="1">
                 <a:solidFill>
                   <a:srgbClr val="E8E4DC"/>
                 </a:solidFill>
@@ -10936,7 +10936,7 @@
               </a:spcAft>
             </a:pPr>
             <a:r>
-              <a:rPr sz="950" b="0">
+              <a:rPr sz="900" b="0">
                 <a:solidFill>
                   <a:srgbClr val="9A9488"/>
                 </a:solidFill>
@@ -10955,8 +10955,8 @@
         </p:nvSpPr>
         <p:spPr>
           <a:xfrm>
-            <a:off x="658368" y="5687568"/>
-            <a:ext cx="6675120" cy="640080"/>
+            <a:off x="658368" y="5285232"/>
+            <a:ext cx="6675120" cy="566928"/>
           </a:xfrm>
           <a:prstGeom prst="roundRect">
             <a:avLst/>
@@ -11001,8 +11001,8 @@
         </p:nvSpPr>
         <p:spPr>
           <a:xfrm>
-            <a:off x="859536" y="5742432"/>
-            <a:ext cx="6309360" cy="548640"/>
+            <a:off x="859536" y="5321808"/>
+            <a:ext cx="6309360" cy="512064"/>
           </a:xfrm>
           <a:prstGeom prst="rect">
             <a:avLst/>
@@ -11017,11 +11017,11 @@
           <a:p>
             <a:pPr algn="l">
               <a:spcAft>
-                <a:spcPts val="200"/>
-              </a:spcAft>
-            </a:pPr>
-            <a:r>
-              <a:rPr sz="1150" b="1">
+                <a:spcPts val="100"/>
+              </a:spcAft>
+            </a:pPr>
+            <a:r>
+              <a:rPr sz="1100" b="1">
                 <a:solidFill>
                   <a:srgbClr val="E8E4DC"/>
                 </a:solidFill>
@@ -11037,7 +11037,7 @@
               </a:spcAft>
             </a:pPr>
             <a:r>
-              <a:rPr sz="950" b="0">
+              <a:rPr sz="900" b="0">
                 <a:solidFill>
                   <a:srgbClr val="9A9488"/>
                 </a:solidFill>
@@ -11051,6 +11051,107 @@
       <p:sp>
         <p:nvSpPr>
           <p:cNvPr id="39" name="Rounded Rectangle 38"/>
+          <p:cNvSpPr/>
+          <p:nvPr/>
+        </p:nvSpPr>
+        <p:spPr>
+          <a:xfrm>
+            <a:off x="658368" y="5907024"/>
+            <a:ext cx="6675120" cy="566928"/>
+          </a:xfrm>
+          <a:prstGeom prst="roundRect">
+            <a:avLst/>
+          </a:prstGeom>
+          <a:solidFill>
+            <a:srgbClr val="161518"/>
+          </a:solidFill>
+          <a:ln>
+            <a:solidFill>
+              <a:srgbClr val="2C2A2E"/>
+            </a:solidFill>
+          </a:ln>
+          <a:effectLst/>
+        </p:spPr>
+        <p:style>
+          <a:lnRef idx="1">
+            <a:schemeClr val="accent1"/>
+          </a:lnRef>
+          <a:fillRef idx="3">
+            <a:schemeClr val="accent1"/>
+          </a:fillRef>
+          <a:effectRef idx="2">
+            <a:schemeClr val="accent1"/>
+          </a:effectRef>
+          <a:fontRef idx="minor">
+            <a:schemeClr val="lt1"/>
+          </a:fontRef>
+        </p:style>
+        <p:txBody>
+          <a:bodyPr rtlCol="0" anchor="ctr"/>
+          <a:lstStyle/>
+          <a:p>
+            <a:pPr algn="ctr"/>
+          </a:p>
+        </p:txBody>
+      </p:sp>
+      <p:sp>
+        <p:nvSpPr>
+          <p:cNvPr id="40" name="TextBox 39"/>
+          <p:cNvSpPr txBox="1"/>
+          <p:nvPr/>
+        </p:nvSpPr>
+        <p:spPr>
+          <a:xfrm>
+            <a:off x="859536" y="5943600"/>
+            <a:ext cx="6309360" cy="512064"/>
+          </a:xfrm>
+          <a:prstGeom prst="rect">
+            <a:avLst/>
+          </a:prstGeom>
+          <a:noFill/>
+        </p:spPr>
+        <p:txBody>
+          <a:bodyPr wrap="square">
+            <a:spAutoFit/>
+          </a:bodyPr>
+          <a:lstStyle/>
+          <a:p>
+            <a:pPr algn="l">
+              <a:spcAft>
+                <a:spcPts val="100"/>
+              </a:spcAft>
+            </a:pPr>
+            <a:r>
+              <a:rPr sz="1100" b="1">
+                <a:solidFill>
+                  <a:srgbClr val="E8E4DC"/>
+                </a:solidFill>
+                <a:latin typeface="Segoe UI"/>
+              </a:rPr>
+              <a:t>开局那二十秒也是性能问题</a:t>
+            </a:r>
+          </a:p>
+          <a:p>
+            <a:pPr algn="l">
+              <a:spcAft>
+                <a:spcPts val="0"/>
+              </a:spcAft>
+            </a:pPr>
+            <a:r>
+              <a:rPr sz="900" b="0">
+                <a:solidFill>
+                  <a:srgbClr val="9A9488"/>
+                </a:solidFill>
+                <a:latin typeface="Segoe UI"/>
+              </a:rPr>
+              <a:t>画质控制器原本从满分辨率起步，注释自己写着代价是「二十秒的幻灯片」。唯一玩过的人报的正是这个。改成从中间档起步：最坏下降从四步减到两步，快机器一两秒内爬回去。</a:t>
+            </a:r>
+          </a:p>
+        </p:txBody>
+      </p:sp>
+      <p:sp>
+        <p:nvSpPr>
+          <p:cNvPr id="41" name="Rounded Rectangle 40"/>
           <p:cNvSpPr/>
           <p:nvPr/>
         </p:nvSpPr>
@@ -11096,7 +11197,7 @@
       </p:sp>
       <p:sp>
         <p:nvSpPr>
-          <p:cNvPr id="40" name="TextBox 39"/>
+          <p:cNvPr id="42" name="TextBox 41"/>
           <p:cNvSpPr txBox="1"/>
           <p:nvPr/>
         </p:nvSpPr>

--- a/artifacts/report/FOREIGN-report.pptx
+++ b/artifacts/report/FOREIGN-report.pptx
@@ -4185,11 +4185,11 @@
             <a:r>
               <a:rPr sz="1100" b="1">
                 <a:solidFill>
-                  <a:srgbClr val="D8A64A"/>
-                </a:solidFill>
-                <a:latin typeface="Segoe UI"/>
-              </a:rPr>
-              <a:t>未上线</a:t>
+                  <a:srgbClr val="6FA86B"/>
+                </a:solidFill>
+                <a:latin typeface="Segoe UI"/>
+              </a:rPr>
+              <a:t>已上线</a:t>
             </a:r>
           </a:p>
         </p:txBody>
@@ -4228,7 +4228,7 @@
                 </a:solidFill>
                 <a:latin typeface="Segoe UI"/>
               </a:rPr>
-              <a:t>gh-pages 已部署、本地验收 7/7，但 Pages 从未开启过（has_pages: false）：需先改仓库为 public，再手工开启一次 Pages。</a:t>
+              <a:t>https://cyn-nya.github.io/foreign/ 返回 200。站点是靠两步手工操作才存在的：改仓库为 public，再用 JSON body 开启 Pages —— gh api -f 撑不起嵌套对象，这一点失败过一次。</a:t>
             </a:r>
           </a:p>
         </p:txBody>
@@ -9670,7 +9670,7 @@
                 </a:solidFill>
                 <a:latin typeface="Segoe UI"/>
               </a:rPr>
-              <a:t>npm run verify  =  类型检查 → 单测 → 构建 → 验收，共 311 项断言，全部通过</a:t>
+              <a:t>npm run verify  =  类型检查 → 单测 → 构建 → 验收，共 313 项断言，全部通过</a:t>
             </a:r>
           </a:p>
         </p:txBody>
@@ -10127,7 +10127,7 @@
                 </a:solidFill>
                 <a:latin typeface="Segoe UI"/>
               </a:rPr>
-              <a:t>82</a:t>
+              <a:t>84</a:t>
             </a:r>
           </a:p>
         </p:txBody>

--- a/artifacts/report/FOREIGN-report.pptx
+++ b/artifacts/report/FOREIGN-report.pptx
@@ -4639,7 +4639,7 @@
                 </a:solidFill>
                 <a:latin typeface="Segoe UI"/>
               </a:rPr>
-              <a:t>X 发帖</a:t>
+              <a:t>已知风险 · 首屏体量</a:t>
             </a:r>
           </a:p>
         </p:txBody>
@@ -4674,11 +4674,11 @@
             <a:r>
               <a:rPr sz="1100" b="1">
                 <a:solidFill>
-                  <a:srgbClr val="C23B2E"/>
-                </a:solidFill>
-                <a:latin typeface="Segoe UI"/>
-              </a:rPr>
-              <a:t>待发</a:t>
+                  <a:srgbClr val="D8A64A"/>
+                </a:solidFill>
+                <a:latin typeface="Segoe UI"/>
+              </a:rPr>
+              <a:t>需注意</a:t>
             </a:r>
           </a:p>
         </p:txBody>
@@ -4692,6 +4692,169 @@
         <p:spPr>
           <a:xfrm>
             <a:off x="6144768" y="5568696"/>
+            <a:ext cx="5114239" cy="402336"/>
+          </a:xfrm>
+          <a:prstGeom prst="rect">
+            <a:avLst/>
+          </a:prstGeom>
+          <a:noFill/>
+        </p:spPr>
+        <p:txBody>
+          <a:bodyPr wrap="square">
+            <a:spAutoFit/>
+          </a:bodyPr>
+          <a:lstStyle/>
+          <a:p>
+            <a:pPr algn="l">
+              <a:spcAft>
+                <a:spcPts val="0"/>
+              </a:spcAft>
+            </a:pPr>
+            <a:r>
+              <a:rPr sz="950" b="0">
+                <a:solidFill>
+                  <a:srgbClr val="9A9488"/>
+                </a:solidFill>
+                <a:latin typeface="Segoe UI"/>
+              </a:rPr>
+              <a:t>启动时一次性加载 55 个模型、约 254 MB。缺资产会退回占位模型不会崩，所以流式加载可行，但会改变 ready 的含义并牵动验收链。</a:t>
+            </a:r>
+          </a:p>
+        </p:txBody>
+      </p:sp>
+      <p:sp>
+        <p:nvSpPr>
+          <p:cNvPr id="35" name="Rounded Rectangle 34"/>
+          <p:cNvSpPr/>
+          <p:nvPr/>
+        </p:nvSpPr>
+        <p:spPr>
+          <a:xfrm>
+            <a:off x="658368" y="6048756"/>
+            <a:ext cx="10874959" cy="621792"/>
+          </a:xfrm>
+          <a:prstGeom prst="roundRect">
+            <a:avLst/>
+          </a:prstGeom>
+          <a:solidFill>
+            <a:srgbClr val="161518"/>
+          </a:solidFill>
+          <a:ln>
+            <a:solidFill>
+              <a:srgbClr val="2C2A2E"/>
+            </a:solidFill>
+          </a:ln>
+          <a:effectLst/>
+        </p:spPr>
+        <p:style>
+          <a:lnRef idx="1">
+            <a:schemeClr val="accent1"/>
+          </a:lnRef>
+          <a:fillRef idx="3">
+            <a:schemeClr val="accent1"/>
+          </a:fillRef>
+          <a:effectRef idx="2">
+            <a:schemeClr val="accent1"/>
+          </a:effectRef>
+          <a:fontRef idx="minor">
+            <a:schemeClr val="lt1"/>
+          </a:fontRef>
+        </p:style>
+        <p:txBody>
+          <a:bodyPr rtlCol="0" anchor="ctr"/>
+          <a:lstStyle/>
+          <a:p>
+            <a:pPr algn="ctr"/>
+          </a:p>
+        </p:txBody>
+      </p:sp>
+      <p:sp>
+        <p:nvSpPr>
+          <p:cNvPr id="36" name="TextBox 35"/>
+          <p:cNvSpPr txBox="1"/>
+          <p:nvPr/>
+        </p:nvSpPr>
+        <p:spPr>
+          <a:xfrm>
+            <a:off x="877824" y="6204204"/>
+            <a:ext cx="4023360" cy="329184"/>
+          </a:xfrm>
+          <a:prstGeom prst="rect">
+            <a:avLst/>
+          </a:prstGeom>
+          <a:noFill/>
+        </p:spPr>
+        <p:txBody>
+          <a:bodyPr wrap="square">
+            <a:spAutoFit/>
+          </a:bodyPr>
+          <a:lstStyle/>
+          <a:p>
+            <a:pPr algn="l">
+              <a:spcAft>
+                <a:spcPts val="0"/>
+              </a:spcAft>
+            </a:pPr>
+            <a:r>
+              <a:rPr sz="1300" b="1">
+                <a:solidFill>
+                  <a:srgbClr val="E8E4DC"/>
+                </a:solidFill>
+                <a:latin typeface="Segoe UI"/>
+              </a:rPr>
+              <a:t>X 发帖</a:t>
+            </a:r>
+          </a:p>
+        </p:txBody>
+      </p:sp>
+      <p:sp>
+        <p:nvSpPr>
+          <p:cNvPr id="37" name="TextBox 36"/>
+          <p:cNvSpPr txBox="1"/>
+          <p:nvPr/>
+        </p:nvSpPr>
+        <p:spPr>
+          <a:xfrm>
+            <a:off x="4956048" y="6195060"/>
+            <a:ext cx="1097280" cy="347472"/>
+          </a:xfrm>
+          <a:prstGeom prst="rect">
+            <a:avLst/>
+          </a:prstGeom>
+          <a:noFill/>
+        </p:spPr>
+        <p:txBody>
+          <a:bodyPr wrap="square">
+            <a:spAutoFit/>
+          </a:bodyPr>
+          <a:lstStyle/>
+          <a:p>
+            <a:pPr algn="l">
+              <a:spcAft>
+                <a:spcPts val="0"/>
+              </a:spcAft>
+            </a:pPr>
+            <a:r>
+              <a:rPr sz="1100" b="1">
+                <a:solidFill>
+                  <a:srgbClr val="C23B2E"/>
+                </a:solidFill>
+                <a:latin typeface="Segoe UI"/>
+              </a:rPr>
+              <a:t>待发</a:t>
+            </a:r>
+          </a:p>
+        </p:txBody>
+      </p:sp>
+      <p:sp>
+        <p:nvSpPr>
+          <p:cNvPr id="38" name="TextBox 37"/>
+          <p:cNvSpPr txBox="1"/>
+          <p:nvPr/>
+        </p:nvSpPr>
+        <p:spPr>
+          <a:xfrm>
+            <a:off x="6144768" y="6176772"/>
             <a:ext cx="5114239" cy="402336"/>
           </a:xfrm>
           <a:prstGeom prst="rect">

--- a/artifacts/report/FOREIGN-report.pptx
+++ b/artifacts/report/FOREIGN-report.pptx
@@ -4639,7 +4639,7 @@
                 </a:solidFill>
                 <a:latin typeface="Segoe UI"/>
               </a:rPr>
-              <a:t>已知风险 · 首屏体量</a:t>
+              <a:t>首屏体量 · 已减半</a:t>
             </a:r>
           </a:p>
         </p:txBody>
@@ -4674,11 +4674,11 @@
             <a:r>
               <a:rPr sz="1100" b="1">
                 <a:solidFill>
-                  <a:srgbClr val="D8A64A"/>
-                </a:solidFill>
-                <a:latin typeface="Segoe UI"/>
-              </a:rPr>
-              <a:t>需注意</a:t>
+                  <a:srgbClr val="6FA86B"/>
+                </a:solidFill>
+                <a:latin typeface="Segoe UI"/>
+              </a:rPr>
+              <a:t>已优化</a:t>
             </a:r>
           </a:p>
         </p:txBody>
@@ -4717,7 +4717,7 @@
                 </a:solidFill>
                 <a:latin typeface="Segoe UI"/>
               </a:rPr>
-              <a:t>启动时一次性加载 55 个模型、约 254 MB。缺资产会退回占位模型不会崩，所以流式加载可行，但会改变 ready 的含义并牵动验收链。</a:t>
+              <a:t>缩小前 84% 的体积是纹理：82 张全是 2048² PNG，而屏幕显示不出 2048²。缩到 1024² 后 254.5 → 111.5 MB（小 56%），55 个仍全部加载。</a:t>
             </a:r>
           </a:p>
         </p:txBody>

--- a/artifacts/report/FOREIGN-report.pptx
+++ b/artifacts/report/FOREIGN-report.pptx
@@ -4639,7 +4639,7 @@
                 </a:solidFill>
                 <a:latin typeface="Segoe UI"/>
               </a:rPr>
-              <a:t>首屏体量 · 已减半</a:t>
+              <a:t>首屏体量 · 两步处理</a:t>
             </a:r>
           </a:p>
         </p:txBody>
@@ -4717,7 +4717,7 @@
                 </a:solidFill>
                 <a:latin typeface="Segoe UI"/>
               </a:rPr>
-              <a:t>缩小前 84% 的体积是纹理：82 张全是 2048² PNG，而屏幕显示不出 2048²。缩到 1024² 后 254.5 → 111.5 MB（小 56%），55 个仍全部加载。</a:t>
+              <a:t>84% 的体积是纹理：82 张全 2048² PNG，而屏幕显示不出 2048²。缩到 1024² 后 254.5 → 111.5 MB（小 56%）。预载也不再阻塞开局。</a:t>
             </a:r>
           </a:p>
         </p:txBody>
@@ -9833,7 +9833,7 @@
                 </a:solidFill>
                 <a:latin typeface="Segoe UI"/>
               </a:rPr>
-              <a:t>npm run verify  =  类型检查 → 单测 → 构建 → 验收，共 313 项断言，全部通过</a:t>
+              <a:t>npm run verify  =  类型检查 → 单测 → 构建 → 验收，共 314 项断言，全部通过</a:t>
             </a:r>
           </a:p>
         </p:txBody>
@@ -10290,7 +10290,7 @@
                 </a:solidFill>
                 <a:latin typeface="Segoe UI"/>
               </a:rPr>
-              <a:t>84</a:t>
+              <a:t>85</a:t>
             </a:r>
           </a:p>
         </p:txBody>
